--- a/10-Knowledge-Products/KP1-GEA/videos/module_4/en/decks/KP1_M4_4.6_Deck_v0.2.pptx
+++ b/10-Knowledge-Products/KP1-GEA/videos/module_4/en/decks/KP1_M4_4.6_Deck_v0.2.pptx
@@ -14,14 +14,14 @@
     <p:handoutMasterId r:id="rId47"/>
   </p:handoutMasterIdLst>
   <p:sldIdLst>
-    <p:sldId id="2681" r:id="rId8"/>
-    <p:sldId id="2731" r:id="rId10"/>
-    <p:sldId id="2732" r:id="rId54"/>
-    <p:sldId id="2733" r:id="rId55"/>
-    <p:sldId id="2734" r:id="rId56"/>
-    <p:sldId id="2735" r:id="rId57"/>
     <p:sldId id="2736" r:id="rId58"/>
     <p:sldId id="2737" r:id="rId59"/>
+    <p:sldId id="2738" r:id="rId60"/>
+    <p:sldId id="2739" r:id="rId61"/>
+    <p:sldId id="2740" r:id="rId62"/>
+    <p:sldId id="2741" r:id="rId63"/>
+    <p:sldId id="2742" r:id="rId64"/>
+    <p:sldId id="2743" r:id="rId65"/>
   </p:sldIdLst>
   <p:sldSz cx="12192000" cy="6858000"/>
   <p:notesSz cx="6858000" cy="9144000"/>
@@ -888,432 +888,6 @@
 </p:notesMaster>
 </file>
 
-<file path=ppt/notesSlides/notesSlide21.xml><?xml version="1.0" encoding="utf-8"?>
-<p:notes xmlns:a="http://schemas.openxmlformats.org/drawingml/2006/main" xmlns:p="http://schemas.openxmlformats.org/presentationml/2006/main" xmlns:r="http://schemas.openxmlformats.org/officeDocument/2006/relationships">
-  <p:cSld>
-    <p:spTree>
-      <p:nvGrpSpPr>
-        <p:cNvPr id="1" name=""/>
-        <p:cNvGrpSpPr/>
-        <p:nvPr/>
-      </p:nvGrpSpPr>
-      <p:grpSpPr>
-        <a:xfrm>
-          <a:off x="0" y="0"/>
-          <a:ext cx="0" cy="0"/>
-          <a:chOff x="0" y="0"/>
-          <a:chExt cx="0" cy="0"/>
-        </a:xfrm>
-      </p:grpSpPr>
-      <p:sp>
-        <p:nvSpPr>
-          <p:cNvPr id="2" name="Slide Image Placeholder 1"/>
-          <p:cNvSpPr>
-            <a:spLocks noGrp="1"/>
-          </p:cNvSpPr>
-          <p:nvPr>
-            <p:ph type="sldImg" idx="2"/>
-          </p:nvPr>
-        </p:nvSpPr>
-        <p:spPr/>
-      </p:sp>
-      <p:sp>
-        <p:nvSpPr>
-          <p:cNvPr id="3" name="Notes Placeholder 2"/>
-          <p:cNvSpPr>
-            <a:spLocks noGrp="1"/>
-          </p:cNvSpPr>
-          <p:nvPr>
-            <p:ph type="body" idx="3" sz="quarter"/>
-          </p:nvPr>
-        </p:nvSpPr>
-        <p:spPr/>
-        <p:txBody>
-          <a:bodyPr/>
-          <a:lstStyle/>
-          <a:p>
-            <a:r>
-              <a:t>Title card for standalone video 4.6. Content slides are identical to the corresponding section of the combined deck KP1_M4_Deck_v0.2.pptx; voice-over is in each slide’s notes.</a:t>
-            </a:r>
-          </a:p>
-        </p:txBody>
-      </p:sp>
-      <p:sp>
-        <p:nvSpPr>
-          <p:cNvPr id="4" name="Slide Number Placeholder 3"/>
-          <p:cNvSpPr>
-            <a:spLocks noGrp="1"/>
-          </p:cNvSpPr>
-          <p:nvPr>
-            <p:ph type="sldNum" idx="5" sz="quarter"/>
-          </p:nvPr>
-        </p:nvSpPr>
-        <p:spPr/>
-      </p:sp>
-    </p:spTree>
-  </p:cSld>
-  <p:clrMapOvr>
-    <a:masterClrMapping/>
-  </p:clrMapOvr>
-</p:notes>
-</file>
-
-<file path=ppt/notesSlides/notesSlide38.xml><?xml version="1.0" encoding="utf-8"?>
-<p:notes xmlns:a="http://schemas.openxmlformats.org/drawingml/2006/main" xmlns:p="http://schemas.openxmlformats.org/presentationml/2006/main" xmlns:r="http://schemas.openxmlformats.org/officeDocument/2006/relationships">
-  <p:cSld>
-    <p:spTree>
-      <p:nvGrpSpPr>
-        <p:cNvPr id="1" name=""/>
-        <p:cNvGrpSpPr/>
-        <p:nvPr/>
-      </p:nvGrpSpPr>
-      <p:grpSpPr>
-        <a:xfrm>
-          <a:off x="0" y="0"/>
-          <a:ext cx="0" cy="0"/>
-          <a:chOff x="0" y="0"/>
-          <a:chExt cx="0" cy="0"/>
-        </a:xfrm>
-      </p:grpSpPr>
-      <p:sp>
-        <p:nvSpPr>
-          <p:cNvPr id="2" name="Slide Image Placeholder 1"/>
-          <p:cNvSpPr>
-            <a:spLocks noGrp="1"/>
-          </p:cNvSpPr>
-          <p:nvPr>
-            <p:ph type="sldImg" idx="2"/>
-          </p:nvPr>
-        </p:nvSpPr>
-        <p:spPr/>
-      </p:sp>
-      <p:sp>
-        <p:nvSpPr>
-          <p:cNvPr id="3" name="Notes Placeholder 2"/>
-          <p:cNvSpPr>
-            <a:spLocks noGrp="1"/>
-          </p:cNvSpPr>
-          <p:nvPr>
-            <p:ph type="body" idx="3" sz="quarter"/>
-          </p:nvPr>
-        </p:nvSpPr>
-        <p:spPr/>
-        <p:txBody>
-          <a:bodyPr/>
-          <a:lstStyle/>
-          <a:p>
-            <a:r>
-              <a:t>VO, slide 1: Phase four is Plan. Now the decisions become a sequence: how does Progressa get from today to the target, in what order, at what cost? The deliverable is a roadmap in waves with investment estimates. About six to eight weeks.</a:t>
-            </a:r>
-          </a:p>
-        </p:txBody>
-      </p:sp>
-      <p:sp>
-        <p:nvSpPr>
-          <p:cNvPr id="4" name="Slide Number Placeholder 3"/>
-          <p:cNvSpPr>
-            <a:spLocks noGrp="1"/>
-          </p:cNvSpPr>
-          <p:nvPr>
-            <p:ph type="sldNum" idx="5" sz="quarter"/>
-          </p:nvPr>
-        </p:nvSpPr>
-        <p:spPr/>
-      </p:sp>
-    </p:spTree>
-  </p:cSld>
-  <p:clrMapOvr>
-    <a:masterClrMapping/>
-  </p:clrMapOvr>
-</p:notes>
-</file>
-
-<file path=ppt/notesSlides/notesSlide39.xml><?xml version="1.0" encoding="utf-8"?>
-<p:notes xmlns:a="http://schemas.openxmlformats.org/drawingml/2006/main" xmlns:p="http://schemas.openxmlformats.org/presentationml/2006/main" xmlns:r="http://schemas.openxmlformats.org/officeDocument/2006/relationships">
-  <p:cSld>
-    <p:spTree>
-      <p:nvGrpSpPr>
-        <p:cNvPr id="1" name=""/>
-        <p:cNvGrpSpPr/>
-        <p:nvPr/>
-      </p:nvGrpSpPr>
-      <p:grpSpPr>
-        <a:xfrm>
-          <a:off x="0" y="0"/>
-          <a:ext cx="0" cy="0"/>
-          <a:chOff x="0" y="0"/>
-          <a:chExt cx="0" cy="0"/>
-        </a:xfrm>
-      </p:grpSpPr>
-      <p:sp>
-        <p:nvSpPr>
-          <p:cNvPr id="2" name="Slide Image Placeholder 1"/>
-          <p:cNvSpPr>
-            <a:spLocks noGrp="1"/>
-          </p:cNvSpPr>
-          <p:nvPr>
-            <p:ph type="sldImg" idx="2"/>
-          </p:nvPr>
-        </p:nvSpPr>
-        <p:spPr/>
-      </p:sp>
-      <p:sp>
-        <p:nvSpPr>
-          <p:cNvPr id="3" name="Notes Placeholder 2"/>
-          <p:cNvSpPr>
-            <a:spLocks noGrp="1"/>
-          </p:cNvSpPr>
-          <p:nvPr>
-            <p:ph type="body" idx="3" sz="quarter"/>
-          </p:nvPr>
-        </p:nvSpPr>
-        <p:spPr/>
-        <p:txBody>
-          <a:bodyPr/>
-          <a:lstStyle/>
-          <a:p>
-            <a:r>
-              <a:t>VO: Progressa sequences the work into waves, the way PAERA's recommended roadmap suggests. Wave one is inception — stand up the repository and the Board, and make the Learner Registry the authoritative learner. Wave two is the high-priority use case — the single learner record, by having the Examination Authority and the grant programme consume the Learner Registry and the Identity Authority instead of their own lists. Wave three builds out the shared data-exchange backbone. Wave four takes it to mass scale — every education service running on the backbone. Each wave delivers something the minister can show, not just groundwork.</a:t>
-            </a:r>
-          </a:p>
-          <a:p/>
-          <a:p>
-            <a:r>
-              <a:t>Production cue: this is the module's centrepiece slide. Hold it. The wave names follow PAERA §5.7.2–§5.7.5 (Inception, High-priority Use Case, Initial Transformation, Mass-scale Transformation).</a:t>
-            </a:r>
-          </a:p>
-        </p:txBody>
-      </p:sp>
-      <p:sp>
-        <p:nvSpPr>
-          <p:cNvPr id="4" name="Slide Number Placeholder 3"/>
-          <p:cNvSpPr>
-            <a:spLocks noGrp="1"/>
-          </p:cNvSpPr>
-          <p:nvPr>
-            <p:ph type="sldNum" idx="5" sz="quarter"/>
-          </p:nvPr>
-        </p:nvSpPr>
-        <p:spPr/>
-      </p:sp>
-    </p:spTree>
-  </p:cSld>
-  <p:clrMapOvr>
-    <a:masterClrMapping/>
-  </p:clrMapOvr>
-</p:notes>
-</file>
-
-<file path=ppt/notesSlides/notesSlide40.xml><?xml version="1.0" encoding="utf-8"?>
-<p:notes xmlns:a="http://schemas.openxmlformats.org/drawingml/2006/main" xmlns:p="http://schemas.openxmlformats.org/presentationml/2006/main" xmlns:r="http://schemas.openxmlformats.org/officeDocument/2006/relationships">
-  <p:cSld>
-    <p:spTree>
-      <p:nvGrpSpPr>
-        <p:cNvPr id="1" name=""/>
-        <p:cNvGrpSpPr/>
-        <p:nvPr/>
-      </p:nvGrpSpPr>
-      <p:grpSpPr>
-        <a:xfrm>
-          <a:off x="0" y="0"/>
-          <a:ext cx="0" cy="0"/>
-          <a:chOff x="0" y="0"/>
-          <a:chExt cx="0" cy="0"/>
-        </a:xfrm>
-      </p:grpSpPr>
-      <p:sp>
-        <p:nvSpPr>
-          <p:cNvPr id="2" name="Slide Image Placeholder 1"/>
-          <p:cNvSpPr>
-            <a:spLocks noGrp="1"/>
-          </p:cNvSpPr>
-          <p:nvPr>
-            <p:ph type="sldImg" idx="2"/>
-          </p:nvPr>
-        </p:nvSpPr>
-        <p:spPr/>
-      </p:sp>
-      <p:sp>
-        <p:nvSpPr>
-          <p:cNvPr id="3" name="Notes Placeholder 2"/>
-          <p:cNvSpPr>
-            <a:spLocks noGrp="1"/>
-          </p:cNvSpPr>
-          <p:nvPr>
-            <p:ph type="body" idx="3" sz="quarter"/>
-          </p:nvPr>
-        </p:nvSpPr>
-        <p:spPr/>
-        <p:txBody>
-          <a:bodyPr/>
-          <a:lstStyle/>
-          <a:p>
-            <a:r>
-              <a:t>VO: Each wave gets an honest cost. Wave one is mostly people — the initial engagement and the small permanent EA team. Wave two adds the integration work to connect the authorities to the registries. Wave three is the backbone investment. The estimates are directional, not quotations — enough for cabinet to commit a five-year envelope, not an annual line that vanishes. And the sequencing is deliberate: the minister sees the single learner record — the thing they promised — land in wave two, inside the first year, not in year five.</a:t>
-            </a:r>
-          </a:p>
-        </p:txBody>
-      </p:sp>
-      <p:sp>
-        <p:nvSpPr>
-          <p:cNvPr id="4" name="Slide Number Placeholder 3"/>
-          <p:cNvSpPr>
-            <a:spLocks noGrp="1"/>
-          </p:cNvSpPr>
-          <p:nvPr>
-            <p:ph type="sldNum" idx="5" sz="quarter"/>
-          </p:nvPr>
-        </p:nvSpPr>
-        <p:spPr/>
-      </p:sp>
-    </p:spTree>
-  </p:cSld>
-  <p:clrMapOvr>
-    <a:masterClrMapping/>
-  </p:clrMapOvr>
-</p:notes>
-</file>
-
-<file path=ppt/notesSlides/notesSlide41.xml><?xml version="1.0" encoding="utf-8"?>
-<p:notes xmlns:a="http://schemas.openxmlformats.org/drawingml/2006/main" xmlns:p="http://schemas.openxmlformats.org/presentationml/2006/main" xmlns:r="http://schemas.openxmlformats.org/officeDocument/2006/relationships">
-  <p:cSld>
-    <p:spTree>
-      <p:nvGrpSpPr>
-        <p:cNvPr id="1" name=""/>
-        <p:cNvGrpSpPr/>
-        <p:nvPr/>
-      </p:nvGrpSpPr>
-      <p:grpSpPr>
-        <a:xfrm>
-          <a:off x="0" y="0"/>
-          <a:ext cx="0" cy="0"/>
-          <a:chOff x="0" y="0"/>
-          <a:chExt cx="0" cy="0"/>
-        </a:xfrm>
-      </p:grpSpPr>
-      <p:sp>
-        <p:nvSpPr>
-          <p:cNvPr id="2" name="Slide Image Placeholder 1"/>
-          <p:cNvSpPr>
-            <a:spLocks noGrp="1"/>
-          </p:cNvSpPr>
-          <p:nvPr>
-            <p:ph type="sldImg" idx="2"/>
-          </p:nvPr>
-        </p:nvSpPr>
-        <p:spPr/>
-      </p:sp>
-      <p:sp>
-        <p:nvSpPr>
-          <p:cNvPr id="3" name="Notes Placeholder 2"/>
-          <p:cNvSpPr>
-            <a:spLocks noGrp="1"/>
-          </p:cNvSpPr>
-          <p:nvPr>
-            <p:ph type="body" idx="3" sz="quarter"/>
-          </p:nvPr>
-        </p:nvSpPr>
-        <p:spPr/>
-        <p:txBody>
-          <a:bodyPr/>
-          <a:lstStyle/>
-          <a:p>
-            <a:r>
-              <a:t>VO: The roadmap does a second job: it is the one page the business side and the IT side both point at — the minister reading outcomes and dates, the architects reading the sequence and its dependencies — so the policy goal and the technical sequence line up without translation.</a:t>
-            </a:r>
-          </a:p>
-        </p:txBody>
-      </p:sp>
-      <p:sp>
-        <p:nvSpPr>
-          <p:cNvPr id="4" name="Slide Number Placeholder 3"/>
-          <p:cNvSpPr>
-            <a:spLocks noGrp="1"/>
-          </p:cNvSpPr>
-          <p:nvPr>
-            <p:ph type="sldNum" idx="5" sz="quarter"/>
-          </p:nvPr>
-        </p:nvSpPr>
-        <p:spPr/>
-      </p:sp>
-    </p:spTree>
-  </p:cSld>
-  <p:clrMapOvr>
-    <a:masterClrMapping/>
-  </p:clrMapOvr>
-</p:notes>
-</file>
-
-<file path=ppt/notesSlides/notesSlide42.xml><?xml version="1.0" encoding="utf-8"?>
-<p:notes xmlns:a="http://schemas.openxmlformats.org/drawingml/2006/main" xmlns:p="http://schemas.openxmlformats.org/presentationml/2006/main" xmlns:r="http://schemas.openxmlformats.org/officeDocument/2006/relationships">
-  <p:cSld>
-    <p:spTree>
-      <p:nvGrpSpPr>
-        <p:cNvPr id="1" name=""/>
-        <p:cNvGrpSpPr/>
-        <p:nvPr/>
-      </p:nvGrpSpPr>
-      <p:grpSpPr>
-        <a:xfrm>
-          <a:off x="0" y="0"/>
-          <a:ext cx="0" cy="0"/>
-          <a:chOff x="0" y="0"/>
-          <a:chExt cx="0" cy="0"/>
-        </a:xfrm>
-      </p:grpSpPr>
-      <p:sp>
-        <p:nvSpPr>
-          <p:cNvPr id="2" name="Slide Image Placeholder 1"/>
-          <p:cNvSpPr>
-            <a:spLocks noGrp="1"/>
-          </p:cNvSpPr>
-          <p:nvPr>
-            <p:ph type="sldImg" idx="2"/>
-          </p:nvPr>
-        </p:nvSpPr>
-        <p:spPr/>
-      </p:sp>
-      <p:sp>
-        <p:nvSpPr>
-          <p:cNvPr id="3" name="Notes Placeholder 2"/>
-          <p:cNvSpPr>
-            <a:spLocks noGrp="1"/>
-          </p:cNvSpPr>
-          <p:nvPr>
-            <p:ph type="body" idx="3" sz="quarter"/>
-          </p:nvPr>
-        </p:nvSpPr>
-        <p:spPr/>
-        <p:txBody>
-          <a:bodyPr/>
-          <a:lstStyle/>
-          <a:p>
-            <a:r>
-              <a:t>VO: Plan ends with the fourth sign-off, the most consequential of the four. The decision-maker and the EA Board approve the roadmap and commit the budget — ideally a multi-year envelope, not an annual line. This is the deliverable the minister takes to cabinet. With it approved, Progressa moves from planning to building. Four sign-offs done, in roughly six months from the first day of Discovery. Now the work shifts to making it live.</a:t>
-            </a:r>
-          </a:p>
-        </p:txBody>
-      </p:sp>
-      <p:sp>
-        <p:nvSpPr>
-          <p:cNvPr id="4" name="Slide Number Placeholder 3"/>
-          <p:cNvSpPr>
-            <a:spLocks noGrp="1"/>
-          </p:cNvSpPr>
-          <p:nvPr>
-            <p:ph type="sldNum" idx="5" sz="quarter"/>
-          </p:nvPr>
-        </p:nvSpPr>
-        <p:spPr/>
-      </p:sp>
-    </p:spTree>
-  </p:cSld>
-  <p:clrMapOvr>
-    <a:masterClrMapping/>
-  </p:clrMapOvr>
-</p:notes>
-</file>
-
 <file path=ppt/notesSlides/notesSlide43.xml><?xml version="1.0" encoding="utf-8"?>
 <p:notes xmlns:a="http://schemas.openxmlformats.org/drawingml/2006/main" xmlns:p="http://schemas.openxmlformats.org/presentationml/2006/main" xmlns:r="http://schemas.openxmlformats.org/officeDocument/2006/relationships">
   <p:cSld>
@@ -1359,13 +933,7 @@
           <a:lstStyle/>
           <a:p>
             <a:r>
-              <a:t>PRACTICE BOX (on-screen only — never read it, never paraphrase it, never point at it). It replaces the narrated handoff: this video ends on the recap and the Sources slide.</a:t>
-            </a:r>
-          </a:p>
-          <a:p/>
-          <a:p>
-            <a:r>
-              <a:t>VO: That is Phase 4 on Progressa. Sequence into waves, each delivering something visible. Cost each wave honestly. Put the minister's promise in an early wave. Sign off the roadmap and commit the budget.</a:t>
+              <a:t>Title card — the cold open. The hosts name the module, the video number, the title and the single message on this slide; no scripted narration. Hold until the opener begins; the opener is narrated on the next slide.</a:t>
             </a:r>
           </a:p>
         </p:txBody>
@@ -1391,6 +959,438 @@
 </file>
 
 <file path=ppt/notesSlides/notesSlide44.xml><?xml version="1.0" encoding="utf-8"?>
+<p:notes xmlns:a="http://schemas.openxmlformats.org/drawingml/2006/main" xmlns:p="http://schemas.openxmlformats.org/presentationml/2006/main" xmlns:r="http://schemas.openxmlformats.org/officeDocument/2006/relationships">
+  <p:cSld>
+    <p:spTree>
+      <p:nvGrpSpPr>
+        <p:cNvPr id="1" name=""/>
+        <p:cNvGrpSpPr/>
+        <p:nvPr/>
+      </p:nvGrpSpPr>
+      <p:grpSpPr>
+        <a:xfrm>
+          <a:off x="0" y="0"/>
+          <a:ext cx="0" cy="0"/>
+          <a:chOff x="0" y="0"/>
+          <a:chExt cx="0" cy="0"/>
+        </a:xfrm>
+      </p:grpSpPr>
+      <p:sp>
+        <p:nvSpPr>
+          <p:cNvPr id="2" name="Slide Image Placeholder 1"/>
+          <p:cNvSpPr>
+            <a:spLocks noGrp="1"/>
+          </p:cNvSpPr>
+          <p:nvPr>
+            <p:ph type="sldImg" idx="2"/>
+          </p:nvPr>
+        </p:nvSpPr>
+        <p:spPr/>
+      </p:sp>
+      <p:sp>
+        <p:nvSpPr>
+          <p:cNvPr id="3" name="Notes Placeholder 2"/>
+          <p:cNvSpPr>
+            <a:spLocks noGrp="1"/>
+          </p:cNvSpPr>
+          <p:nvPr>
+            <p:ph type="body" idx="3" sz="quarter"/>
+          </p:nvPr>
+        </p:nvSpPr>
+        <p:spPr/>
+        <p:txBody>
+          <a:bodyPr/>
+          <a:lstStyle/>
+          <a:p>
+            <a:r>
+              <a:t>VO: Phase four is Plan. Now the decisions become a sequence: how does Progressa get from today to the target, in what order, at what cost? The deliverable is a roadmap in waves with investment estimates. About six to eight weeks.</a:t>
+            </a:r>
+          </a:p>
+        </p:txBody>
+      </p:sp>
+      <p:sp>
+        <p:nvSpPr>
+          <p:cNvPr id="4" name="Slide Number Placeholder 3"/>
+          <p:cNvSpPr>
+            <a:spLocks noGrp="1"/>
+          </p:cNvSpPr>
+          <p:nvPr>
+            <p:ph type="sldNum" idx="5" sz="quarter"/>
+          </p:nvPr>
+        </p:nvSpPr>
+        <p:spPr/>
+      </p:sp>
+    </p:spTree>
+  </p:cSld>
+  <p:clrMapOvr>
+    <a:masterClrMapping/>
+  </p:clrMapOvr>
+</p:notes>
+</file>
+
+<file path=ppt/notesSlides/notesSlide45.xml><?xml version="1.0" encoding="utf-8"?>
+<p:notes xmlns:a="http://schemas.openxmlformats.org/drawingml/2006/main" xmlns:p="http://schemas.openxmlformats.org/presentationml/2006/main" xmlns:r="http://schemas.openxmlformats.org/officeDocument/2006/relationships">
+  <p:cSld>
+    <p:spTree>
+      <p:nvGrpSpPr>
+        <p:cNvPr id="1" name=""/>
+        <p:cNvGrpSpPr/>
+        <p:nvPr/>
+      </p:nvGrpSpPr>
+      <p:grpSpPr>
+        <a:xfrm>
+          <a:off x="0" y="0"/>
+          <a:ext cx="0" cy="0"/>
+          <a:chOff x="0" y="0"/>
+          <a:chExt cx="0" cy="0"/>
+        </a:xfrm>
+      </p:grpSpPr>
+      <p:sp>
+        <p:nvSpPr>
+          <p:cNvPr id="2" name="Slide Image Placeholder 1"/>
+          <p:cNvSpPr>
+            <a:spLocks noGrp="1"/>
+          </p:cNvSpPr>
+          <p:nvPr>
+            <p:ph type="sldImg" idx="2"/>
+          </p:nvPr>
+        </p:nvSpPr>
+        <p:spPr/>
+      </p:sp>
+      <p:sp>
+        <p:nvSpPr>
+          <p:cNvPr id="3" name="Notes Placeholder 2"/>
+          <p:cNvSpPr>
+            <a:spLocks noGrp="1"/>
+          </p:cNvSpPr>
+          <p:nvPr>
+            <p:ph type="body" idx="3" sz="quarter"/>
+          </p:nvPr>
+        </p:nvSpPr>
+        <p:spPr/>
+        <p:txBody>
+          <a:bodyPr/>
+          <a:lstStyle/>
+          <a:p>
+            <a:r>
+              <a:t>VO: Progressa sequences the work into waves, the way PAERA's recommended roadmap suggests. Wave one is inception — stand up the repository and the Board, and make the Learner Registry the authoritative learner. Wave two is the high-priority use case — the single learner record, by having the Examination Authority and the grant programme consume the Learner Registry and the Identity Authority instead of their own lists. Wave three builds out the shared data-exchange backbone. Wave four takes it to mass scale — every education service running on the backbone. Each wave delivers something the minister can show, not just groundwork.</a:t>
+            </a:r>
+          </a:p>
+          <a:p/>
+          <a:p>
+            <a:r>
+              <a:t>Production cue: this is the module's centrepiece slide. Hold it. The wave names follow PAERA §5.7.2–§5.7.5 (Inception, High-priority Use Case, Initial Transformation, Mass-scale Transformation).</a:t>
+            </a:r>
+          </a:p>
+        </p:txBody>
+      </p:sp>
+      <p:sp>
+        <p:nvSpPr>
+          <p:cNvPr id="4" name="Slide Number Placeholder 3"/>
+          <p:cNvSpPr>
+            <a:spLocks noGrp="1"/>
+          </p:cNvSpPr>
+          <p:nvPr>
+            <p:ph type="sldNum" idx="5" sz="quarter"/>
+          </p:nvPr>
+        </p:nvSpPr>
+        <p:spPr/>
+      </p:sp>
+    </p:spTree>
+  </p:cSld>
+  <p:clrMapOvr>
+    <a:masterClrMapping/>
+  </p:clrMapOvr>
+</p:notes>
+</file>
+
+<file path=ppt/notesSlides/notesSlide46.xml><?xml version="1.0" encoding="utf-8"?>
+<p:notes xmlns:a="http://schemas.openxmlformats.org/drawingml/2006/main" xmlns:p="http://schemas.openxmlformats.org/presentationml/2006/main" xmlns:r="http://schemas.openxmlformats.org/officeDocument/2006/relationships">
+  <p:cSld>
+    <p:spTree>
+      <p:nvGrpSpPr>
+        <p:cNvPr id="1" name=""/>
+        <p:cNvGrpSpPr/>
+        <p:nvPr/>
+      </p:nvGrpSpPr>
+      <p:grpSpPr>
+        <a:xfrm>
+          <a:off x="0" y="0"/>
+          <a:ext cx="0" cy="0"/>
+          <a:chOff x="0" y="0"/>
+          <a:chExt cx="0" cy="0"/>
+        </a:xfrm>
+      </p:grpSpPr>
+      <p:sp>
+        <p:nvSpPr>
+          <p:cNvPr id="2" name="Slide Image Placeholder 1"/>
+          <p:cNvSpPr>
+            <a:spLocks noGrp="1"/>
+          </p:cNvSpPr>
+          <p:nvPr>
+            <p:ph type="sldImg" idx="2"/>
+          </p:nvPr>
+        </p:nvSpPr>
+        <p:spPr/>
+      </p:sp>
+      <p:sp>
+        <p:nvSpPr>
+          <p:cNvPr id="3" name="Notes Placeholder 2"/>
+          <p:cNvSpPr>
+            <a:spLocks noGrp="1"/>
+          </p:cNvSpPr>
+          <p:nvPr>
+            <p:ph type="body" idx="3" sz="quarter"/>
+          </p:nvPr>
+        </p:nvSpPr>
+        <p:spPr/>
+        <p:txBody>
+          <a:bodyPr/>
+          <a:lstStyle/>
+          <a:p>
+            <a:r>
+              <a:t>VO: Each wave gets an honest cost. Wave one is mostly people — the initial engagement and the small permanent EA team. Wave two adds the integration work to connect the authorities to the registries. Wave three is the backbone investment. The estimates are directional, not quotations — enough for cabinet to commit a five-year envelope, not an annual line that vanishes. And the sequencing is deliberate: the minister sees the single learner record — the thing they promised — land in wave two, inside the first year, not in year five.</a:t>
+            </a:r>
+          </a:p>
+        </p:txBody>
+      </p:sp>
+      <p:sp>
+        <p:nvSpPr>
+          <p:cNvPr id="4" name="Slide Number Placeholder 3"/>
+          <p:cNvSpPr>
+            <a:spLocks noGrp="1"/>
+          </p:cNvSpPr>
+          <p:nvPr>
+            <p:ph type="sldNum" idx="5" sz="quarter"/>
+          </p:nvPr>
+        </p:nvSpPr>
+        <p:spPr/>
+      </p:sp>
+    </p:spTree>
+  </p:cSld>
+  <p:clrMapOvr>
+    <a:masterClrMapping/>
+  </p:clrMapOvr>
+</p:notes>
+</file>
+
+<file path=ppt/notesSlides/notesSlide47.xml><?xml version="1.0" encoding="utf-8"?>
+<p:notes xmlns:a="http://schemas.openxmlformats.org/drawingml/2006/main" xmlns:p="http://schemas.openxmlformats.org/presentationml/2006/main" xmlns:r="http://schemas.openxmlformats.org/officeDocument/2006/relationships">
+  <p:cSld>
+    <p:spTree>
+      <p:nvGrpSpPr>
+        <p:cNvPr id="1" name=""/>
+        <p:cNvGrpSpPr/>
+        <p:nvPr/>
+      </p:nvGrpSpPr>
+      <p:grpSpPr>
+        <a:xfrm>
+          <a:off x="0" y="0"/>
+          <a:ext cx="0" cy="0"/>
+          <a:chOff x="0" y="0"/>
+          <a:chExt cx="0" cy="0"/>
+        </a:xfrm>
+      </p:grpSpPr>
+      <p:sp>
+        <p:nvSpPr>
+          <p:cNvPr id="2" name="Slide Image Placeholder 1"/>
+          <p:cNvSpPr>
+            <a:spLocks noGrp="1"/>
+          </p:cNvSpPr>
+          <p:nvPr>
+            <p:ph type="sldImg" idx="2"/>
+          </p:nvPr>
+        </p:nvSpPr>
+        <p:spPr/>
+      </p:sp>
+      <p:sp>
+        <p:nvSpPr>
+          <p:cNvPr id="3" name="Notes Placeholder 2"/>
+          <p:cNvSpPr>
+            <a:spLocks noGrp="1"/>
+          </p:cNvSpPr>
+          <p:nvPr>
+            <p:ph type="body" idx="3" sz="quarter"/>
+          </p:nvPr>
+        </p:nvSpPr>
+        <p:spPr/>
+        <p:txBody>
+          <a:bodyPr/>
+          <a:lstStyle/>
+          <a:p>
+            <a:r>
+              <a:t>VO: The roadmap does a second job: it is the one page the business side and the IT side both point at — the minister reading outcomes and dates, the architects reading the sequence and its dependencies — so the policy goal and the technical sequence line up without translation.</a:t>
+            </a:r>
+          </a:p>
+        </p:txBody>
+      </p:sp>
+      <p:sp>
+        <p:nvSpPr>
+          <p:cNvPr id="4" name="Slide Number Placeholder 3"/>
+          <p:cNvSpPr>
+            <a:spLocks noGrp="1"/>
+          </p:cNvSpPr>
+          <p:nvPr>
+            <p:ph type="sldNum" idx="5" sz="quarter"/>
+          </p:nvPr>
+        </p:nvSpPr>
+        <p:spPr/>
+      </p:sp>
+    </p:spTree>
+  </p:cSld>
+  <p:clrMapOvr>
+    <a:masterClrMapping/>
+  </p:clrMapOvr>
+</p:notes>
+</file>
+
+<file path=ppt/notesSlides/notesSlide48.xml><?xml version="1.0" encoding="utf-8"?>
+<p:notes xmlns:a="http://schemas.openxmlformats.org/drawingml/2006/main" xmlns:p="http://schemas.openxmlformats.org/presentationml/2006/main" xmlns:r="http://schemas.openxmlformats.org/officeDocument/2006/relationships">
+  <p:cSld>
+    <p:spTree>
+      <p:nvGrpSpPr>
+        <p:cNvPr id="1" name=""/>
+        <p:cNvGrpSpPr/>
+        <p:nvPr/>
+      </p:nvGrpSpPr>
+      <p:grpSpPr>
+        <a:xfrm>
+          <a:off x="0" y="0"/>
+          <a:ext cx="0" cy="0"/>
+          <a:chOff x="0" y="0"/>
+          <a:chExt cx="0" cy="0"/>
+        </a:xfrm>
+      </p:grpSpPr>
+      <p:sp>
+        <p:nvSpPr>
+          <p:cNvPr id="2" name="Slide Image Placeholder 1"/>
+          <p:cNvSpPr>
+            <a:spLocks noGrp="1"/>
+          </p:cNvSpPr>
+          <p:nvPr>
+            <p:ph type="sldImg" idx="2"/>
+          </p:nvPr>
+        </p:nvSpPr>
+        <p:spPr/>
+      </p:sp>
+      <p:sp>
+        <p:nvSpPr>
+          <p:cNvPr id="3" name="Notes Placeholder 2"/>
+          <p:cNvSpPr>
+            <a:spLocks noGrp="1"/>
+          </p:cNvSpPr>
+          <p:nvPr>
+            <p:ph type="body" idx="3" sz="quarter"/>
+          </p:nvPr>
+        </p:nvSpPr>
+        <p:spPr/>
+        <p:txBody>
+          <a:bodyPr/>
+          <a:lstStyle/>
+          <a:p>
+            <a:r>
+              <a:t>VO: Plan ends with the fourth sign-off, the most consequential of the four. The decision-maker and the EA Board approve the roadmap and commit the budget — ideally a multi-year envelope, not an annual line. This is the deliverable the minister takes to cabinet. With it approved, Progressa moves from planning to building. Four sign-offs done, in roughly six months from the first day of Discovery. Now the work shifts to making it live.</a:t>
+            </a:r>
+          </a:p>
+        </p:txBody>
+      </p:sp>
+      <p:sp>
+        <p:nvSpPr>
+          <p:cNvPr id="4" name="Slide Number Placeholder 3"/>
+          <p:cNvSpPr>
+            <a:spLocks noGrp="1"/>
+          </p:cNvSpPr>
+          <p:nvPr>
+            <p:ph type="sldNum" idx="5" sz="quarter"/>
+          </p:nvPr>
+        </p:nvSpPr>
+        <p:spPr/>
+      </p:sp>
+    </p:spTree>
+  </p:cSld>
+  <p:clrMapOvr>
+    <a:masterClrMapping/>
+  </p:clrMapOvr>
+</p:notes>
+</file>
+
+<file path=ppt/notesSlides/notesSlide49.xml><?xml version="1.0" encoding="utf-8"?>
+<p:notes xmlns:a="http://schemas.openxmlformats.org/drawingml/2006/main" xmlns:p="http://schemas.openxmlformats.org/presentationml/2006/main" xmlns:r="http://schemas.openxmlformats.org/officeDocument/2006/relationships">
+  <p:cSld>
+    <p:spTree>
+      <p:nvGrpSpPr>
+        <p:cNvPr id="1" name=""/>
+        <p:cNvGrpSpPr/>
+        <p:nvPr/>
+      </p:nvGrpSpPr>
+      <p:grpSpPr>
+        <a:xfrm>
+          <a:off x="0" y="0"/>
+          <a:ext cx="0" cy="0"/>
+          <a:chOff x="0" y="0"/>
+          <a:chExt cx="0" cy="0"/>
+        </a:xfrm>
+      </p:grpSpPr>
+      <p:sp>
+        <p:nvSpPr>
+          <p:cNvPr id="2" name="Slide Image Placeholder 1"/>
+          <p:cNvSpPr>
+            <a:spLocks noGrp="1"/>
+          </p:cNvSpPr>
+          <p:nvPr>
+            <p:ph type="sldImg" idx="2"/>
+          </p:nvPr>
+        </p:nvSpPr>
+        <p:spPr/>
+      </p:sp>
+      <p:sp>
+        <p:nvSpPr>
+          <p:cNvPr id="3" name="Notes Placeholder 2"/>
+          <p:cNvSpPr>
+            <a:spLocks noGrp="1"/>
+          </p:cNvSpPr>
+          <p:nvPr>
+            <p:ph type="body" idx="3" sz="quarter"/>
+          </p:nvPr>
+        </p:nvSpPr>
+        <p:spPr/>
+        <p:txBody>
+          <a:bodyPr/>
+          <a:lstStyle/>
+          <a:p>
+            <a:r>
+              <a:t>PRACTICE BOX (on-screen only — never read it, never paraphrase it, never point at it). It replaces the narrated handoff: this video ends on the recap and the Sources slide.</a:t>
+            </a:r>
+          </a:p>
+          <a:p/>
+          <a:p>
+            <a:r>
+              <a:t>VO: That is Phase 4 on Progressa. Sequence into waves, each delivering something visible. Cost each wave honestly. Put the minister's promise in an early wave. Sign off the roadmap and commit the budget.</a:t>
+            </a:r>
+          </a:p>
+        </p:txBody>
+      </p:sp>
+      <p:sp>
+        <p:nvSpPr>
+          <p:cNvPr id="4" name="Slide Number Placeholder 3"/>
+          <p:cNvSpPr>
+            <a:spLocks noGrp="1"/>
+          </p:cNvSpPr>
+          <p:nvPr>
+            <p:ph type="sldNum" idx="5" sz="quarter"/>
+          </p:nvPr>
+        </p:nvSpPr>
+        <p:spPr/>
+      </p:sp>
+    </p:spTree>
+  </p:cSld>
+  <p:clrMapOvr>
+    <a:masterClrMapping/>
+  </p:clrMapOvr>
+</p:notes>
+</file>
+
+<file path=ppt/notesSlides/notesSlide50.xml><?xml version="1.0" encoding="utf-8"?>
 <p:notes xmlns:a="http://schemas.openxmlformats.org/drawingml/2006/main" xmlns:p="http://schemas.openxmlformats.org/presentationml/2006/main" xmlns:r="http://schemas.openxmlformats.org/officeDocument/2006/relationships">
   <p:cSld>
     <p:spTree>
@@ -11596,8 +11596,8 @@
 </p:sldMaster>
 </file>
 
-<file path=ppt/slides/slide1.xml><?xml version="1.0" encoding="utf-8"?>
-<p:sld xmlns:a="http://schemas.openxmlformats.org/drawingml/2006/main" xmlns:r="http://schemas.openxmlformats.org/officeDocument/2006/relationships" xmlns:p="http://schemas.openxmlformats.org/presentationml/2006/main">
+<file path=ppt/slides/slide43.xml><?xml version="1.0" encoding="utf-8"?>
+<p:sld xmlns:a="http://schemas.openxmlformats.org/drawingml/2006/main" xmlns:p="http://schemas.openxmlformats.org/presentationml/2006/main" xmlns:r="http://schemas.openxmlformats.org/officeDocument/2006/relationships">
   <p:cSld>
     <p:spTree>
       <p:nvGrpSpPr>
@@ -11605,222 +11605,133 @@
         <p:cNvGrpSpPr/>
         <p:nvPr/>
       </p:nvGrpSpPr>
-      <p:grpSpPr>
-        <a:xfrm>
-          <a:off x="0" y="0"/>
-          <a:ext cx="0" cy="0"/>
-          <a:chOff x="0" y="0"/>
-          <a:chExt cx="0" cy="0"/>
-        </a:xfrm>
-      </p:grpSpPr>
-      <p:cxnSp>
-        <p:nvCxnSpPr>
-          <p:cNvPr id="11" name="Straight Connector 10">
-            <a:extLst>
-              <a:ext uri="{FF2B5EF4-FFF2-40B4-BE49-F238E27FC236}">
-                <a16:creationId xmlns:a16="http://schemas.microsoft.com/office/drawing/2014/main" id="{D9AD66F2-F7C0-4D03-9150-D28F17AC561D}"/>
-              </a:ext>
-            </a:extLst>
-          </p:cNvPr>
-          <p:cNvCxnSpPr>
-            <a:cxnSpLocks/>
-          </p:cNvCxnSpPr>
+      <p:grpSpPr/>
+      <p:sp>
+        <p:nvSpPr>
+          <p:cNvPr id="2" name="TextBox 1"/>
+          <p:cNvSpPr txBox="1"/>
           <p:nvPr/>
-        </p:nvCxnSpPr>
-        <p:spPr>
-          <a:xfrm>
-            <a:off x="373021" y="2198718"/>
-            <a:ext cx="6843567" cy="0"/>
-          </a:xfrm>
-          <a:prstGeom prst="line">
-            <a:avLst/>
-          </a:prstGeom>
-          <a:ln w="12700">
-            <a:solidFill>
-              <a:srgbClr val="009CD6"/>
-            </a:solidFill>
-          </a:ln>
-        </p:spPr>
-        <p:style>
-          <a:lnRef idx="1">
-            <a:schemeClr val="accent1"/>
-          </a:lnRef>
-          <a:fillRef idx="0">
-            <a:schemeClr val="accent1"/>
-          </a:fillRef>
-          <a:effectRef idx="0">
-            <a:schemeClr val="accent1"/>
-          </a:effectRef>
-          <a:fontRef idx="minor">
-            <a:schemeClr val="tx1"/>
-          </a:fontRef>
-        </p:style>
-      </p:cxnSp>
-      <p:sp>
-        <p:nvSpPr>
-          <p:cNvPr id="12" name="Title 9">
-            <a:extLst>
-              <a:ext uri="{FF2B5EF4-FFF2-40B4-BE49-F238E27FC236}">
-                <a16:creationId xmlns:a16="http://schemas.microsoft.com/office/drawing/2014/main" id="{EEB08032-CE0E-4986-AEDF-A41026C0E8B9}"/>
-              </a:ext>
-            </a:extLst>
-          </p:cNvPr>
-          <p:cNvSpPr txBox="1">
-            <a:spLocks/>
-          </p:cNvSpPr>
-          <p:nvPr/>
-        </p:nvSpPr>
-        <p:spPr>
-          <a:xfrm>
-            <a:off x="237734" y="702833"/>
-            <a:ext cx="6432007" cy="1218817"/>
+        </p:nvSpPr>
+        <p:spPr>
+          <a:xfrm>
+            <a:off x="822960" y="822960"/>
+            <a:ext cx="7315200" cy="457200"/>
           </a:xfrm>
           <a:prstGeom prst="rect">
             <a:avLst/>
           </a:prstGeom>
-        </p:spPr>
-        <p:txBody>
-          <a:bodyPr anchor="b">
-            <a:noAutofit/>
+          <a:noFill/>
+        </p:spPr>
+        <p:txBody>
+          <a:bodyPr wrap="square">
+            <a:spAutoFit/>
           </a:bodyPr>
-          <a:lstStyle>
-            <a:lvl1pPr algn="l" defTabSz="914400" rtl="0" eaLnBrk="1" latinLnBrk="0" hangingPunct="1">
-              <a:lnSpc>
-                <a:spcPct val="90000"/>
-              </a:lnSpc>
-              <a:spcBef>
-                <a:spcPct val="0"/>
-              </a:spcBef>
-              <a:buNone/>
-              <a:defRPr sz="4000" kern="1200">
+          <a:lstStyle/>
+          <a:p>
+            <a:r>
+              <a:rPr sz="1200" b="1" i="0">
                 <a:solidFill>
-                  <a:schemeClr val="bg1"/>
+                  <a:srgbClr val="595959"/>
                 </a:solidFill>
-                <a:latin typeface="Arial" panose="020B0604020202020204" pitchFamily="34" charset="0"/>
-                <a:ea typeface="+mj-ea"/>
-                <a:cs typeface="Arial" panose="020B0604020202020204" pitchFamily="34" charset="0"/>
-              </a:defRPr>
-            </a:lvl1pPr>
-          </a:lstStyle>
-          <a:p>
-            <a:r>
-              <a:rPr sz="2400" b="1" i="0">
+                <a:latin typeface="Arial"/>
+              </a:rPr>
+              <a:t>KP1 · MODULE 4 · VIDEO 4.6</a:t>
+            </a:r>
+          </a:p>
+        </p:txBody>
+      </p:sp>
+      <p:sp>
+        <p:nvSpPr>
+          <p:cNvPr id="3" name="TextBox 2"/>
+          <p:cNvSpPr txBox="1"/>
+          <p:nvPr/>
+        </p:nvSpPr>
+        <p:spPr>
+          <a:xfrm>
+            <a:off x="822960" y="1828800"/>
+            <a:ext cx="2011680" cy="1097280"/>
+          </a:xfrm>
+          <a:prstGeom prst="rect">
+            <a:avLst/>
+          </a:prstGeom>
+          <a:noFill/>
+        </p:spPr>
+        <p:txBody>
+          <a:bodyPr wrap="square">
+            <a:spAutoFit/>
+          </a:bodyPr>
+          <a:lstStyle/>
+          <a:p>
+            <a:r>
+              <a:rPr sz="6000" b="1" i="0">
+                <a:solidFill>
+                  <a:srgbClr val="009CD6"/>
+                </a:solidFill>
+                <a:latin typeface="Arial"/>
+              </a:rPr>
+              <a:t>4.6</a:t>
+            </a:r>
+          </a:p>
+        </p:txBody>
+      </p:sp>
+      <p:sp>
+        <p:nvSpPr>
+          <p:cNvPr id="4" name="TextBox 3"/>
+          <p:cNvSpPr txBox="1"/>
+          <p:nvPr/>
+        </p:nvSpPr>
+        <p:spPr>
+          <a:xfrm>
+            <a:off x="822960" y="2880360"/>
+            <a:ext cx="9601200" cy="1371600"/>
+          </a:xfrm>
+          <a:prstGeom prst="rect">
+            <a:avLst/>
+          </a:prstGeom>
+          <a:noFill/>
+        </p:spPr>
+        <p:txBody>
+          <a:bodyPr wrap="square">
+            <a:spAutoFit/>
+          </a:bodyPr>
+          <a:lstStyle/>
+          <a:p>
+            <a:r>
+              <a:rPr sz="3400" b="1" i="0">
                 <a:solidFill>
                   <a:srgbClr val="1A1A1A"/>
                 </a:solidFill>
                 <a:latin typeface="Arial"/>
               </a:rPr>
-              <a:t>4.6 — Phase 4, Plan — sequence the roadmap and cost it</a:t>
-            </a:r>
-          </a:p>
-        </p:txBody>
-      </p:sp>
-      <p:pic>
-        <p:nvPicPr>
-          <p:cNvPr id="7" name="Picture 6">
-            <a:extLst>
-              <a:ext uri="{FF2B5EF4-FFF2-40B4-BE49-F238E27FC236}">
-                <a16:creationId xmlns:a16="http://schemas.microsoft.com/office/drawing/2014/main" id="{A2066351-C569-4C4C-A096-308777FCDC32}"/>
-              </a:ext>
-            </a:extLst>
-          </p:cNvPr>
-          <p:cNvPicPr>
-            <a:picLocks noChangeAspect="1"/>
-          </p:cNvPicPr>
+              <a:t>Phase 4, Plan — sequence the roadmap and cost it</a:t>
+            </a:r>
+          </a:p>
+        </p:txBody>
+      </p:sp>
+      <p:sp>
+        <p:nvSpPr>
+          <p:cNvPr id="5" name="TextBox 4"/>
+          <p:cNvSpPr txBox="1"/>
           <p:nvPr/>
-        </p:nvPicPr>
-        <p:blipFill>
-          <a:blip r:embed="rId2">
-            <a:extLst>
-              <a:ext uri="{28A0092B-C50C-407E-A947-70E740481C1C}">
-                <a14:useLocalDpi xmlns:a14="http://schemas.microsoft.com/office/drawing/2010/main" val="0"/>
-              </a:ext>
-            </a:extLst>
-          </a:blip>
-          <a:srcRect t="20219" b="14729"/>
-          <a:stretch>
-            <a:fillRect/>
-          </a:stretch>
-        </p:blipFill>
-        <p:spPr>
-          <a:xfrm>
-            <a:off x="0" y="5620871"/>
-            <a:ext cx="1323975" cy="1218816"/>
+        </p:nvSpPr>
+        <p:spPr>
+          <a:xfrm>
+            <a:off x="822960" y="4343400"/>
+            <a:ext cx="9875520" cy="1554480"/>
           </a:xfrm>
           <a:prstGeom prst="rect">
             <a:avLst/>
           </a:prstGeom>
-        </p:spPr>
-      </p:pic>
-      <p:sp>
-        <p:nvSpPr>
-          <p:cNvPr id="14" name="Title 9">
-            <a:extLst>
-              <a:ext uri="{FF2B5EF4-FFF2-40B4-BE49-F238E27FC236}">
-                <a16:creationId xmlns:a16="http://schemas.microsoft.com/office/drawing/2014/main" id="{B5087B80-3EE4-1881-0130-ED58CA625092}"/>
-              </a:ext>
-            </a:extLst>
-          </p:cNvPr>
-          <p:cNvSpPr txBox="1">
-            <a:spLocks/>
-          </p:cNvSpPr>
-          <p:nvPr/>
-        </p:nvSpPr>
-        <p:spPr>
-          <a:xfrm>
-            <a:off x="284452" y="2475786"/>
-            <a:ext cx="6382893" cy="953213"/>
-          </a:xfrm>
-          <a:prstGeom prst="rect">
-            <a:avLst/>
-          </a:prstGeom>
-        </p:spPr>
-        <p:txBody>
-          <a:bodyPr anchor="t">
-            <a:noAutofit/>
+          <a:noFill/>
+        </p:spPr>
+        <p:txBody>
+          <a:bodyPr wrap="square">
+            <a:spAutoFit/>
           </a:bodyPr>
-          <a:lstStyle>
-            <a:lvl1pPr algn="l" defTabSz="914400" rtl="0" eaLnBrk="1" latinLnBrk="0" hangingPunct="1">
-              <a:lnSpc>
-                <a:spcPct val="90000"/>
-              </a:lnSpc>
-              <a:spcBef>
-                <a:spcPct val="0"/>
-              </a:spcBef>
-              <a:buNone/>
-              <a:defRPr sz="4000" kern="1200">
-                <a:solidFill>
-                  <a:schemeClr val="bg1"/>
-                </a:solidFill>
-                <a:latin typeface="Arial" panose="020B0604020202020204" pitchFamily="34" charset="0"/>
-                <a:ea typeface="+mj-ea"/>
-                <a:cs typeface="Arial" panose="020B0604020202020204" pitchFamily="34" charset="0"/>
-              </a:defRPr>
-            </a:lvl1pPr>
-          </a:lstStyle>
-          <a:p>
-            <a:pPr marL="0" marR="0" lvl="0" indent="0" rtl="0">
-              <a:spcBef>
-                <a:spcPts val="600"/>
-              </a:spcBef>
-              <a:spcAft>
-                <a:spcPts val="0"/>
-              </a:spcAft>
-              <a:buNone/>
-            </a:pPr>
-            <a:r>
-              <a:rPr sz="1300" b="1" i="0">
-                <a:solidFill>
-                  <a:srgbClr val="006E96"/>
-                </a:solidFill>
-                <a:latin typeface="Arial"/>
-              </a:rPr>
-              <a:t>KP1 · Government Enterprise Architecture · Module 4 · Video 4.6</a:t>
-            </a:r>
-          </a:p>
-          <a:p>
-            <a:r>
-              <a:rPr sz="1200" b="0" i="1">
+          <a:lstStyle/>
+          <a:p>
+            <a:r>
+              <a:rPr sz="1700" b="0" i="1">
                 <a:solidFill>
                   <a:srgbClr val="595959"/>
                 </a:solidFill>
@@ -11833,91 +11744,292 @@
       </p:sp>
       <p:sp>
         <p:nvSpPr>
-          <p:cNvPr id="17" name="Title 9">
-            <a:extLst>
-              <a:ext uri="{FF2B5EF4-FFF2-40B4-BE49-F238E27FC236}">
-                <a16:creationId xmlns:a16="http://schemas.microsoft.com/office/drawing/2014/main" id="{5E8796F7-DD26-D250-5E97-B38B22298E72}"/>
-              </a:ext>
-            </a:extLst>
-          </p:cNvPr>
-          <p:cNvSpPr txBox="1">
-            <a:spLocks/>
-          </p:cNvSpPr>
+          <p:cNvPr id="6" name="TextBox 5"/>
+          <p:cNvSpPr txBox="1"/>
           <p:nvPr/>
         </p:nvSpPr>
         <p:spPr>
           <a:xfrm>
-            <a:off x="284452" y="4363897"/>
-            <a:ext cx="6382893" cy="953213"/>
+            <a:off x="822960" y="5989320"/>
+            <a:ext cx="7315200" cy="365760"/>
           </a:xfrm>
           <a:prstGeom prst="rect">
             <a:avLst/>
           </a:prstGeom>
-        </p:spPr>
-        <p:txBody>
-          <a:bodyPr anchor="t">
-            <a:noAutofit/>
+          <a:noFill/>
+        </p:spPr>
+        <p:txBody>
+          <a:bodyPr wrap="square">
+            <a:spAutoFit/>
           </a:bodyPr>
-          <a:lstStyle>
-            <a:lvl1pPr algn="l" defTabSz="914400" rtl="0" eaLnBrk="1" latinLnBrk="0" hangingPunct="1">
-              <a:lnSpc>
-                <a:spcPct val="90000"/>
-              </a:lnSpc>
-              <a:spcBef>
-                <a:spcPct val="0"/>
-              </a:spcBef>
-              <a:buNone/>
-              <a:defRPr sz="4000" kern="1200">
+          <a:lstStyle/>
+          <a:p>
+            <a:r>
+              <a:rPr sz="1200" b="0" i="0">
                 <a:solidFill>
-                  <a:schemeClr val="bg1"/>
+                  <a:srgbClr val="595959"/>
                 </a:solidFill>
-                <a:latin typeface="Arial" panose="020B0604020202020204" pitchFamily="34" charset="0"/>
-                <a:ea typeface="+mj-ea"/>
-                <a:cs typeface="Arial" panose="020B0604020202020204" pitchFamily="34" charset="0"/>
-              </a:defRPr>
-            </a:lvl1pPr>
-          </a:lstStyle>
-          <a:p>
-            <a:pPr marL="0" marR="0" lvl="0" indent="0" rtl="0">
-              <a:spcBef>
-                <a:spcPts val="600"/>
-              </a:spcBef>
-              <a:spcAft>
-                <a:spcPts val="1200"/>
-              </a:spcAft>
-              <a:buNone/>
-            </a:pPr>
-            <a:r>
-              <a:rPr sz="1400" b="1" i="0">
+                <a:latin typeface="Arial"/>
+              </a:rPr>
+              <a:t>~4 minutes · standalone video · voice-over on text slides</a:t>
+            </a:r>
+          </a:p>
+        </p:txBody>
+      </p:sp>
+    </p:spTree>
+  </p:cSld>
+  <p:clrMapOvr>
+    <a:masterClrMapping/>
+  </p:clrMapOvr>
+</p:sld>
+</file>
+
+<file path=ppt/slides/slide44.xml><?xml version="1.0" encoding="utf-8"?>
+<p:sld xmlns:a="http://schemas.openxmlformats.org/drawingml/2006/main" xmlns:p="http://schemas.openxmlformats.org/presentationml/2006/main" xmlns:r="http://schemas.openxmlformats.org/officeDocument/2006/relationships">
+  <p:cSld>
+    <p:spTree>
+      <p:nvGrpSpPr>
+        <p:cNvPr id="1" name=""/>
+        <p:cNvGrpSpPr/>
+        <p:nvPr/>
+      </p:nvGrpSpPr>
+      <p:grpSpPr/>
+      <p:sp>
+        <p:nvSpPr>
+          <p:cNvPr id="2" name="TextBox 1"/>
+          <p:cNvSpPr txBox="1"/>
+          <p:nvPr/>
+        </p:nvSpPr>
+        <p:spPr>
+          <a:xfrm>
+            <a:off x="1005840" y="1325880"/>
+            <a:ext cx="5486400" cy="365760"/>
+          </a:xfrm>
+          <a:prstGeom prst="rect">
+            <a:avLst/>
+          </a:prstGeom>
+          <a:noFill/>
+        </p:spPr>
+        <p:txBody>
+          <a:bodyPr wrap="square">
+            <a:spAutoFit/>
+          </a:bodyPr>
+          <a:lstStyle/>
+          <a:p>
+            <a:r>
+              <a:rPr sz="1200" b="1" i="0">
+                <a:solidFill>
+                  <a:srgbClr val="006E96"/>
+                </a:solidFill>
+                <a:latin typeface="Arial"/>
+              </a:rPr>
+              <a:t>WHERE WE START</a:t>
+            </a:r>
+          </a:p>
+        </p:txBody>
+      </p:sp>
+      <p:sp>
+        <p:nvSpPr>
+          <p:cNvPr id="3" name="TextBox 2"/>
+          <p:cNvSpPr txBox="1"/>
+          <p:nvPr/>
+        </p:nvSpPr>
+        <p:spPr>
+          <a:xfrm>
+            <a:off x="1005840" y="1783080"/>
+            <a:ext cx="10149840" cy="1737360"/>
+          </a:xfrm>
+          <a:prstGeom prst="rect">
+            <a:avLst/>
+          </a:prstGeom>
+          <a:noFill/>
+        </p:spPr>
+        <p:txBody>
+          <a:bodyPr wrap="square">
+            <a:spAutoFit/>
+          </a:bodyPr>
+          <a:lstStyle/>
+          <a:p>
+            <a:r>
+              <a:rPr sz="3000" b="1" i="0">
                 <a:solidFill>
                   <a:srgbClr val="1A1A1A"/>
                 </a:solidFill>
                 <a:latin typeface="Arial"/>
               </a:rPr>
-              <a:t>Target audience: </a:t>
-            </a:r>
-            <a:r>
-              <a:rPr sz="1400" b="0" i="0">
+              <a:t>Phase 4 — Plan. In what order, at what cost?</a:t>
+            </a:r>
+          </a:p>
+        </p:txBody>
+      </p:sp>
+      <p:sp>
+        <p:nvSpPr>
+          <p:cNvPr id="4" name="TextBox 3"/>
+          <p:cNvSpPr txBox="1"/>
+          <p:nvPr/>
+        </p:nvSpPr>
+        <p:spPr>
+          <a:xfrm>
+            <a:off x="1005840" y="3611880"/>
+            <a:ext cx="10149840" cy="2377440"/>
+          </a:xfrm>
+          <a:prstGeom prst="rect">
+            <a:avLst/>
+          </a:prstGeom>
+          <a:noFill/>
+        </p:spPr>
+        <p:txBody>
+          <a:bodyPr wrap="square">
+            <a:spAutoFit/>
+          </a:bodyPr>
+          <a:lstStyle/>
+          <a:p>
+            <a:pPr>
+              <a:spcAft>
+                <a:spcPts val="800"/>
+              </a:spcAft>
+            </a:pPr>
+            <a:r>
+              <a:rPr sz="1700" b="0" i="0">
                 <a:solidFill>
-                  <a:srgbClr val="1A1A1A"/>
+                  <a:srgbClr val="595959"/>
                 </a:solidFill>
                 <a:latin typeface="Arial"/>
               </a:rPr>
-              <a:t>Chief architect · senior architect · sector ICT lead</a:t>
-            </a:r>
-          </a:p>
-        </p:txBody>
-      </p:sp>
-      <p:sp>
-        <p:nvSpPr>
-          <p:cNvPr id="18" name="Rectangle 17"/>
+              <a:t>How does Progressa get from today to the target?</a:t>
+            </a:r>
+          </a:p>
+          <a:p>
+            <a:pPr>
+              <a:spcAft>
+                <a:spcPts val="800"/>
+              </a:spcAft>
+            </a:pPr>
+            <a:r>
+              <a:rPr sz="1700" b="0" i="0">
+                <a:solidFill>
+                  <a:srgbClr val="595959"/>
+                </a:solidFill>
+                <a:latin typeface="Arial"/>
+              </a:rPr>
+              <a:t>The deliverable: a roadmap in waves, with investment estimates.</a:t>
+            </a:r>
+          </a:p>
+          <a:p>
+            <a:pPr>
+              <a:spcAft>
+                <a:spcPts val="800"/>
+              </a:spcAft>
+            </a:pPr>
+            <a:r>
+              <a:rPr sz="1700" b="0" i="0">
+                <a:solidFill>
+                  <a:srgbClr val="595959"/>
+                </a:solidFill>
+                <a:latin typeface="Arial"/>
+              </a:rPr>
+              <a:t>About six to eight weeks.</a:t>
+            </a:r>
+          </a:p>
+        </p:txBody>
+      </p:sp>
+      <p:sp>
+        <p:nvSpPr>
+          <p:cNvPr id="5" name="TextBox 4"/>
+          <p:cNvSpPr txBox="1"/>
+          <p:nvPr/>
+        </p:nvSpPr>
+        <p:spPr>
+          <a:xfrm>
+            <a:off x="457200" y="6473952"/>
+            <a:ext cx="7772400" cy="292608"/>
+          </a:xfrm>
+          <a:prstGeom prst="rect">
+            <a:avLst/>
+          </a:prstGeom>
+          <a:noFill/>
+        </p:spPr>
+        <p:txBody>
+          <a:bodyPr wrap="square">
+            <a:spAutoFit/>
+          </a:bodyPr>
+          <a:lstStyle/>
+          <a:p>
+            <a:r>
+              <a:rPr sz="900" b="0" i="0">
+                <a:solidFill>
+                  <a:srgbClr val="595959"/>
+                </a:solidFill>
+                <a:latin typeface="Arial"/>
+              </a:rPr>
+              <a:t>4.6 · Phase 4, Plan — sequence the roadmap and cost it</a:t>
+            </a:r>
+          </a:p>
+        </p:txBody>
+      </p:sp>
+      <p:sp>
+        <p:nvSpPr>
+          <p:cNvPr id="6" name="TextBox 5"/>
+          <p:cNvSpPr txBox="1"/>
+          <p:nvPr/>
+        </p:nvSpPr>
+        <p:spPr>
+          <a:xfrm>
+            <a:off x="10058400" y="6473952"/>
+            <a:ext cx="1673352" cy="292608"/>
+          </a:xfrm>
+          <a:prstGeom prst="rect">
+            <a:avLst/>
+          </a:prstGeom>
+          <a:noFill/>
+        </p:spPr>
+        <p:txBody>
+          <a:bodyPr wrap="square">
+            <a:spAutoFit/>
+          </a:bodyPr>
+          <a:lstStyle/>
+          <a:p>
+            <a:pPr algn="r"/>
+            <a:r>
+              <a:rPr sz="900" b="0" i="0">
+                <a:solidFill>
+                  <a:srgbClr val="595959"/>
+                </a:solidFill>
+                <a:latin typeface="Arial"/>
+              </a:rPr>
+              <a:t>www.itu.int</a:t>
+            </a:r>
+          </a:p>
+        </p:txBody>
+      </p:sp>
+    </p:spTree>
+  </p:cSld>
+  <p:clrMapOvr>
+    <a:masterClrMapping/>
+  </p:clrMapOvr>
+</p:sld>
+</file>
+
+<file path=ppt/slides/slide45.xml><?xml version="1.0" encoding="utf-8"?>
+<p:sld xmlns:a="http://schemas.openxmlformats.org/drawingml/2006/main" xmlns:p="http://schemas.openxmlformats.org/presentationml/2006/main" xmlns:r="http://schemas.openxmlformats.org/officeDocument/2006/relationships">
+  <p:cSld>
+    <p:spTree>
+      <p:nvGrpSpPr>
+        <p:cNvPr id="1" name=""/>
+        <p:cNvGrpSpPr/>
+        <p:nvPr/>
+      </p:nvGrpSpPr>
+      <p:grpSpPr/>
+      <p:sp>
+        <p:nvSpPr>
+          <p:cNvPr id="2" name="Rectangle 1"/>
           <p:cNvSpPr/>
           <p:nvPr/>
         </p:nvSpPr>
         <p:spPr>
           <a:xfrm>
-            <a:off x="7022592" y="0"/>
-            <a:ext cx="5169103" cy="6858000"/>
+            <a:off x="457200" y="384048"/>
+            <a:ext cx="45720" cy="256032"/>
           </a:xfrm>
           <a:prstGeom prst="rect">
             <a:avLst/>
@@ -11954,14 +12066,14 @@
       </p:sp>
       <p:sp>
         <p:nvSpPr>
-          <p:cNvPr id="19" name="TextBox 18"/>
+          <p:cNvPr id="3" name="TextBox 2"/>
           <p:cNvSpPr txBox="1"/>
           <p:nvPr/>
         </p:nvSpPr>
         <p:spPr>
           <a:xfrm>
-            <a:off x="7452360" y="457200"/>
-            <a:ext cx="4297680" cy="457200"/>
+            <a:off x="621792" y="274320"/>
+            <a:ext cx="11247120" cy="914400"/>
           </a:xfrm>
           <a:prstGeom prst="rect">
             <a:avLst/>
@@ -11975,35 +12087,35 @@
           <a:lstStyle/>
           <a:p>
             <a:r>
-              <a:rPr sz="1100" b="1" i="0">
+              <a:rPr sz="2800" b="1" i="0">
                 <a:solidFill>
-                  <a:srgbClr val="E5F5FB"/>
+                  <a:srgbClr val="1A1A1A"/>
                 </a:solidFill>
                 <a:latin typeface="Arial"/>
               </a:rPr>
-              <a:t>THE FIVE PHASES, RUN ON ONE SECTOR</a:t>
-            </a:r>
-          </a:p>
-        </p:txBody>
-      </p:sp>
-      <p:sp>
-        <p:nvSpPr>
-          <p:cNvPr id="20" name="Rounded Rectangle 19"/>
+              <a:t>Four waves, and each one delivers something the minister can show</a:t>
+            </a:r>
+          </a:p>
+        </p:txBody>
+      </p:sp>
+      <p:sp>
+        <p:nvSpPr>
+          <p:cNvPr id="4" name="Rounded Rectangle 3"/>
           <p:cNvSpPr/>
           <p:nvPr/>
         </p:nvSpPr>
         <p:spPr>
           <a:xfrm>
-            <a:off x="7452360" y="960120"/>
-            <a:ext cx="3840480" cy="658368"/>
+            <a:off x="658368" y="1536192"/>
+            <a:ext cx="10881360" cy="960120"/>
           </a:xfrm>
           <a:prstGeom prst="roundRect">
             <a:avLst>
-              <a:gd name="adj" fmla="val 14000"/>
+              <a:gd name="adj" fmla="val 4500"/>
             </a:avLst>
           </a:prstGeom>
           <a:solidFill>
-            <a:srgbClr val="FFFFFF"/>
+            <a:srgbClr val="E5F5FB"/>
           </a:solidFill>
           <a:ln>
             <a:noFill/>
@@ -12025,40 +12137,133 @@
           </a:fontRef>
         </p:style>
         <p:txBody>
-          <a:bodyPr rtlCol="0" anchor="ctr" lIns="164592" wrap="square"/>
+          <a:bodyPr rtlCol="0" anchor="ctr"/>
           <a:lstStyle/>
           <a:p>
             <a:pPr algn="ctr"/>
-            <a:r>
-              <a:rPr sz="1500" b="1" i="0">
+          </a:p>
+        </p:txBody>
+      </p:sp>
+      <p:sp>
+        <p:nvSpPr>
+          <p:cNvPr id="5" name="TextBox 4"/>
+          <p:cNvSpPr txBox="1"/>
+          <p:nvPr/>
+        </p:nvSpPr>
+        <p:spPr>
+          <a:xfrm>
+            <a:off x="896112" y="1682495"/>
+            <a:ext cx="1371600" cy="320040"/>
+          </a:xfrm>
+          <a:prstGeom prst="rect">
+            <a:avLst/>
+          </a:prstGeom>
+          <a:noFill/>
+        </p:spPr>
+        <p:txBody>
+          <a:bodyPr wrap="square">
+            <a:spAutoFit/>
+          </a:bodyPr>
+          <a:lstStyle/>
+          <a:p>
+            <a:r>
+              <a:rPr sz="1200" b="1" i="0">
+                <a:solidFill>
+                  <a:srgbClr val="006E96"/>
+                </a:solidFill>
+                <a:latin typeface="Arial"/>
+              </a:rPr>
+              <a:t>WAVE 1</a:t>
+            </a:r>
+          </a:p>
+        </p:txBody>
+      </p:sp>
+      <p:sp>
+        <p:nvSpPr>
+          <p:cNvPr id="6" name="TextBox 5"/>
+          <p:cNvSpPr txBox="1"/>
+          <p:nvPr/>
+        </p:nvSpPr>
+        <p:spPr>
+          <a:xfrm>
+            <a:off x="896112" y="1993391"/>
+            <a:ext cx="3840480" cy="411480"/>
+          </a:xfrm>
+          <a:prstGeom prst="rect">
+            <a:avLst/>
+          </a:prstGeom>
+          <a:noFill/>
+        </p:spPr>
+        <p:txBody>
+          <a:bodyPr wrap="square">
+            <a:spAutoFit/>
+          </a:bodyPr>
+          <a:lstStyle/>
+          <a:p>
+            <a:r>
+              <a:rPr sz="1900" b="1" i="0">
                 <a:solidFill>
                   <a:srgbClr val="1A1A1A"/>
                 </a:solidFill>
                 <a:latin typeface="Arial"/>
               </a:rPr>
-              <a:t>Discover — an honest picture</a:t>
-            </a:r>
-          </a:p>
-        </p:txBody>
-      </p:sp>
-      <p:sp>
-        <p:nvSpPr>
-          <p:cNvPr id="21" name="Rounded Rectangle 20"/>
+              <a:t>Inception</a:t>
+            </a:r>
+          </a:p>
+        </p:txBody>
+      </p:sp>
+      <p:sp>
+        <p:nvSpPr>
+          <p:cNvPr id="7" name="TextBox 6"/>
+          <p:cNvSpPr txBox="1"/>
+          <p:nvPr/>
+        </p:nvSpPr>
+        <p:spPr>
+          <a:xfrm>
+            <a:off x="5029200" y="1737360"/>
+            <a:ext cx="6309360" cy="640080"/>
+          </a:xfrm>
+          <a:prstGeom prst="rect">
+            <a:avLst/>
+          </a:prstGeom>
+          <a:noFill/>
+        </p:spPr>
+        <p:txBody>
+          <a:bodyPr wrap="square">
+            <a:spAutoFit/>
+          </a:bodyPr>
+          <a:lstStyle/>
+          <a:p>
+            <a:r>
+              <a:rPr sz="1550" b="0" i="0">
+                <a:solidFill>
+                  <a:srgbClr val="1A1A1A"/>
+                </a:solidFill>
+                <a:latin typeface="Arial"/>
+              </a:rPr>
+              <a:t>Stand up the repository and the Board; make the Learner Registry authoritative.</a:t>
+            </a:r>
+          </a:p>
+        </p:txBody>
+      </p:sp>
+      <p:sp>
+        <p:nvSpPr>
+          <p:cNvPr id="8" name="Rounded Rectangle 7"/>
           <p:cNvSpPr/>
           <p:nvPr/>
         </p:nvSpPr>
         <p:spPr>
           <a:xfrm>
-            <a:off x="7452360" y="1892808"/>
-            <a:ext cx="3840480" cy="658368"/>
+            <a:off x="658368" y="2587752"/>
+            <a:ext cx="10881360" cy="960120"/>
           </a:xfrm>
           <a:prstGeom prst="roundRect">
             <a:avLst>
-              <a:gd name="adj" fmla="val 14000"/>
+              <a:gd name="adj" fmla="val 4500"/>
             </a:avLst>
           </a:prstGeom>
           <a:solidFill>
-            <a:srgbClr val="FFFFFF"/>
+            <a:srgbClr val="E5F5FB"/>
           </a:solidFill>
           <a:ln>
             <a:noFill/>
@@ -12080,40 +12285,133 @@
           </a:fontRef>
         </p:style>
         <p:txBody>
-          <a:bodyPr rtlCol="0" anchor="ctr" lIns="164592" wrap="square"/>
+          <a:bodyPr rtlCol="0" anchor="ctr"/>
           <a:lstStyle/>
           <a:p>
             <a:pPr algn="ctr"/>
-            <a:r>
-              <a:rPr sz="1500" b="1" i="0">
+          </a:p>
+        </p:txBody>
+      </p:sp>
+      <p:sp>
+        <p:nvSpPr>
+          <p:cNvPr id="9" name="TextBox 8"/>
+          <p:cNvSpPr txBox="1"/>
+          <p:nvPr/>
+        </p:nvSpPr>
+        <p:spPr>
+          <a:xfrm>
+            <a:off x="896112" y="2734056"/>
+            <a:ext cx="1371600" cy="320040"/>
+          </a:xfrm>
+          <a:prstGeom prst="rect">
+            <a:avLst/>
+          </a:prstGeom>
+          <a:noFill/>
+        </p:spPr>
+        <p:txBody>
+          <a:bodyPr wrap="square">
+            <a:spAutoFit/>
+          </a:bodyPr>
+          <a:lstStyle/>
+          <a:p>
+            <a:r>
+              <a:rPr sz="1200" b="1" i="0">
+                <a:solidFill>
+                  <a:srgbClr val="006E96"/>
+                </a:solidFill>
+                <a:latin typeface="Arial"/>
+              </a:rPr>
+              <a:t>WAVE 2</a:t>
+            </a:r>
+          </a:p>
+        </p:txBody>
+      </p:sp>
+      <p:sp>
+        <p:nvSpPr>
+          <p:cNvPr id="10" name="TextBox 9"/>
+          <p:cNvSpPr txBox="1"/>
+          <p:nvPr/>
+        </p:nvSpPr>
+        <p:spPr>
+          <a:xfrm>
+            <a:off x="896112" y="3044952"/>
+            <a:ext cx="3840480" cy="411480"/>
+          </a:xfrm>
+          <a:prstGeom prst="rect">
+            <a:avLst/>
+          </a:prstGeom>
+          <a:noFill/>
+        </p:spPr>
+        <p:txBody>
+          <a:bodyPr wrap="square">
+            <a:spAutoFit/>
+          </a:bodyPr>
+          <a:lstStyle/>
+          <a:p>
+            <a:r>
+              <a:rPr sz="1900" b="1" i="0">
                 <a:solidFill>
                   <a:srgbClr val="1A1A1A"/>
                 </a:solidFill>
                 <a:latin typeface="Arial"/>
               </a:rPr>
-              <a:t>Assess — a ranked gap analysis</a:t>
-            </a:r>
-          </a:p>
-        </p:txBody>
-      </p:sp>
-      <p:sp>
-        <p:nvSpPr>
-          <p:cNvPr id="22" name="Rounded Rectangle 21"/>
+              <a:t>High-priority use case</a:t>
+            </a:r>
+          </a:p>
+        </p:txBody>
+      </p:sp>
+      <p:sp>
+        <p:nvSpPr>
+          <p:cNvPr id="11" name="TextBox 10"/>
+          <p:cNvSpPr txBox="1"/>
+          <p:nvPr/>
+        </p:nvSpPr>
+        <p:spPr>
+          <a:xfrm>
+            <a:off x="5029200" y="2788920"/>
+            <a:ext cx="6309360" cy="640080"/>
+          </a:xfrm>
+          <a:prstGeom prst="rect">
+            <a:avLst/>
+          </a:prstGeom>
+          <a:noFill/>
+        </p:spPr>
+        <p:txBody>
+          <a:bodyPr wrap="square">
+            <a:spAutoFit/>
+          </a:bodyPr>
+          <a:lstStyle/>
+          <a:p>
+            <a:r>
+              <a:rPr sz="1550" b="0" i="0">
+                <a:solidFill>
+                  <a:srgbClr val="1A1A1A"/>
+                </a:solidFill>
+                <a:latin typeface="Arial"/>
+              </a:rPr>
+              <a:t>The single learner record — PNEA and the grant programme consume PLR and PNIA.</a:t>
+            </a:r>
+          </a:p>
+        </p:txBody>
+      </p:sp>
+      <p:sp>
+        <p:nvSpPr>
+          <p:cNvPr id="12" name="Rounded Rectangle 11"/>
           <p:cNvSpPr/>
           <p:nvPr/>
         </p:nvSpPr>
         <p:spPr>
           <a:xfrm>
-            <a:off x="7452360" y="2825496"/>
-            <a:ext cx="3840480" cy="658368"/>
+            <a:off x="658368" y="3639312"/>
+            <a:ext cx="10881360" cy="960120"/>
           </a:xfrm>
           <a:prstGeom prst="roundRect">
             <a:avLst>
-              <a:gd name="adj" fmla="val 14000"/>
+              <a:gd name="adj" fmla="val 4500"/>
             </a:avLst>
           </a:prstGeom>
           <a:solidFill>
-            <a:srgbClr val="FFFFFF"/>
+            <a:srgbClr val="E5F5FB"/>
           </a:solidFill>
           <a:ln>
             <a:noFill/>
@@ -12135,40 +12433,133 @@
           </a:fontRef>
         </p:style>
         <p:txBody>
-          <a:bodyPr rtlCol="0" anchor="ctr" lIns="164592" wrap="square"/>
+          <a:bodyPr rtlCol="0" anchor="ctr"/>
           <a:lstStyle/>
           <a:p>
             <a:pPr algn="ctr"/>
-            <a:r>
-              <a:rPr sz="1500" b="1" i="0">
+          </a:p>
+        </p:txBody>
+      </p:sp>
+      <p:sp>
+        <p:nvSpPr>
+          <p:cNvPr id="13" name="TextBox 12"/>
+          <p:cNvSpPr txBox="1"/>
+          <p:nvPr/>
+        </p:nvSpPr>
+        <p:spPr>
+          <a:xfrm>
+            <a:off x="896112" y="3785615"/>
+            <a:ext cx="1371600" cy="320040"/>
+          </a:xfrm>
+          <a:prstGeom prst="rect">
+            <a:avLst/>
+          </a:prstGeom>
+          <a:noFill/>
+        </p:spPr>
+        <p:txBody>
+          <a:bodyPr wrap="square">
+            <a:spAutoFit/>
+          </a:bodyPr>
+          <a:lstStyle/>
+          <a:p>
+            <a:r>
+              <a:rPr sz="1200" b="1" i="0">
+                <a:solidFill>
+                  <a:srgbClr val="006E96"/>
+                </a:solidFill>
+                <a:latin typeface="Arial"/>
+              </a:rPr>
+              <a:t>WAVE 3</a:t>
+            </a:r>
+          </a:p>
+        </p:txBody>
+      </p:sp>
+      <p:sp>
+        <p:nvSpPr>
+          <p:cNvPr id="14" name="TextBox 13"/>
+          <p:cNvSpPr txBox="1"/>
+          <p:nvPr/>
+        </p:nvSpPr>
+        <p:spPr>
+          <a:xfrm>
+            <a:off x="896112" y="4096512"/>
+            <a:ext cx="3840480" cy="411480"/>
+          </a:xfrm>
+          <a:prstGeom prst="rect">
+            <a:avLst/>
+          </a:prstGeom>
+          <a:noFill/>
+        </p:spPr>
+        <p:txBody>
+          <a:bodyPr wrap="square">
+            <a:spAutoFit/>
+          </a:bodyPr>
+          <a:lstStyle/>
+          <a:p>
+            <a:r>
+              <a:rPr sz="1900" b="1" i="0">
                 <a:solidFill>
                   <a:srgbClr val="1A1A1A"/>
                 </a:solidFill>
                 <a:latin typeface="Arial"/>
               </a:rPr>
-              <a:t>Adapt — framework and sourcing</a:t>
-            </a:r>
-          </a:p>
-        </p:txBody>
-      </p:sp>
-      <p:sp>
-        <p:nvSpPr>
-          <p:cNvPr id="23" name="Rounded Rectangle 22"/>
+              <a:t>The shared backbone</a:t>
+            </a:r>
+          </a:p>
+        </p:txBody>
+      </p:sp>
+      <p:sp>
+        <p:nvSpPr>
+          <p:cNvPr id="15" name="TextBox 14"/>
+          <p:cNvSpPr txBox="1"/>
+          <p:nvPr/>
+        </p:nvSpPr>
+        <p:spPr>
+          <a:xfrm>
+            <a:off x="5029200" y="3840480"/>
+            <a:ext cx="6309360" cy="640080"/>
+          </a:xfrm>
+          <a:prstGeom prst="rect">
+            <a:avLst/>
+          </a:prstGeom>
+          <a:noFill/>
+        </p:spPr>
+        <p:txBody>
+          <a:bodyPr wrap="square">
+            <a:spAutoFit/>
+          </a:bodyPr>
+          <a:lstStyle/>
+          <a:p>
+            <a:r>
+              <a:rPr sz="1550" b="0" i="0">
+                <a:solidFill>
+                  <a:srgbClr val="1A1A1A"/>
+                </a:solidFill>
+                <a:latin typeface="Arial"/>
+              </a:rPr>
+              <a:t>Build out PDGA’s data-exchange backbone.</a:t>
+            </a:r>
+          </a:p>
+        </p:txBody>
+      </p:sp>
+      <p:sp>
+        <p:nvSpPr>
+          <p:cNvPr id="16" name="Rounded Rectangle 15"/>
           <p:cNvSpPr/>
           <p:nvPr/>
         </p:nvSpPr>
         <p:spPr>
           <a:xfrm>
-            <a:off x="7452360" y="3758184"/>
-            <a:ext cx="3840480" cy="658368"/>
+            <a:off x="658368" y="4690872"/>
+            <a:ext cx="10881360" cy="960120"/>
           </a:xfrm>
           <a:prstGeom prst="roundRect">
             <a:avLst>
-              <a:gd name="adj" fmla="val 14000"/>
+              <a:gd name="adj" fmla="val 4500"/>
             </a:avLst>
           </a:prstGeom>
           <a:solidFill>
-            <a:srgbClr val="FFFFFF"/>
+            <a:srgbClr val="E5F5FB"/>
           </a:solidFill>
           <a:ln>
             <a:noFill/>
@@ -12190,40 +12581,217 @@
           </a:fontRef>
         </p:style>
         <p:txBody>
-          <a:bodyPr rtlCol="0" anchor="ctr" lIns="164592" wrap="square"/>
+          <a:bodyPr rtlCol="0" anchor="ctr"/>
           <a:lstStyle/>
           <a:p>
             <a:pPr algn="ctr"/>
-            <a:r>
-              <a:rPr sz="1500" b="1" i="0">
+          </a:p>
+        </p:txBody>
+      </p:sp>
+      <p:sp>
+        <p:nvSpPr>
+          <p:cNvPr id="17" name="TextBox 16"/>
+          <p:cNvSpPr txBox="1"/>
+          <p:nvPr/>
+        </p:nvSpPr>
+        <p:spPr>
+          <a:xfrm>
+            <a:off x="896112" y="4837176"/>
+            <a:ext cx="1371600" cy="320040"/>
+          </a:xfrm>
+          <a:prstGeom prst="rect">
+            <a:avLst/>
+          </a:prstGeom>
+          <a:noFill/>
+        </p:spPr>
+        <p:txBody>
+          <a:bodyPr wrap="square">
+            <a:spAutoFit/>
+          </a:bodyPr>
+          <a:lstStyle/>
+          <a:p>
+            <a:r>
+              <a:rPr sz="1200" b="1" i="0">
+                <a:solidFill>
+                  <a:srgbClr val="006E96"/>
+                </a:solidFill>
+                <a:latin typeface="Arial"/>
+              </a:rPr>
+              <a:t>WAVE 4</a:t>
+            </a:r>
+          </a:p>
+        </p:txBody>
+      </p:sp>
+      <p:sp>
+        <p:nvSpPr>
+          <p:cNvPr id="18" name="TextBox 17"/>
+          <p:cNvSpPr txBox="1"/>
+          <p:nvPr/>
+        </p:nvSpPr>
+        <p:spPr>
+          <a:xfrm>
+            <a:off x="896112" y="5148072"/>
+            <a:ext cx="3840480" cy="411480"/>
+          </a:xfrm>
+          <a:prstGeom prst="rect">
+            <a:avLst/>
+          </a:prstGeom>
+          <a:noFill/>
+        </p:spPr>
+        <p:txBody>
+          <a:bodyPr wrap="square">
+            <a:spAutoFit/>
+          </a:bodyPr>
+          <a:lstStyle/>
+          <a:p>
+            <a:r>
+              <a:rPr sz="1900" b="1" i="0">
                 <a:solidFill>
                   <a:srgbClr val="1A1A1A"/>
                 </a:solidFill>
                 <a:latin typeface="Arial"/>
               </a:rPr>
-              <a:t>Plan — the target, then the roadmap</a:t>
-            </a:r>
-          </a:p>
-        </p:txBody>
-      </p:sp>
-      <p:sp>
-        <p:nvSpPr>
-          <p:cNvPr id="24" name="Rounded Rectangle 23"/>
+              <a:t>Mass scale</a:t>
+            </a:r>
+          </a:p>
+        </p:txBody>
+      </p:sp>
+      <p:sp>
+        <p:nvSpPr>
+          <p:cNvPr id="19" name="TextBox 18"/>
+          <p:cNvSpPr txBox="1"/>
+          <p:nvPr/>
+        </p:nvSpPr>
+        <p:spPr>
+          <a:xfrm>
+            <a:off x="5029200" y="4892040"/>
+            <a:ext cx="6309360" cy="640080"/>
+          </a:xfrm>
+          <a:prstGeom prst="rect">
+            <a:avLst/>
+          </a:prstGeom>
+          <a:noFill/>
+        </p:spPr>
+        <p:txBody>
+          <a:bodyPr wrap="square">
+            <a:spAutoFit/>
+          </a:bodyPr>
+          <a:lstStyle/>
+          <a:p>
+            <a:r>
+              <a:rPr sz="1550" b="0" i="0">
+                <a:solidFill>
+                  <a:srgbClr val="1A1A1A"/>
+                </a:solidFill>
+                <a:latin typeface="Arial"/>
+              </a:rPr>
+              <a:t>Every education service running on the backbone.</a:t>
+            </a:r>
+          </a:p>
+        </p:txBody>
+      </p:sp>
+      <p:sp>
+        <p:nvSpPr>
+          <p:cNvPr id="20" name="TextBox 19"/>
+          <p:cNvSpPr txBox="1"/>
+          <p:nvPr/>
+        </p:nvSpPr>
+        <p:spPr>
+          <a:xfrm>
+            <a:off x="658368" y="5806440"/>
+            <a:ext cx="10881360" cy="548640"/>
+          </a:xfrm>
+          <a:prstGeom prst="rect">
+            <a:avLst/>
+          </a:prstGeom>
+          <a:noFill/>
+        </p:spPr>
+        <p:txBody>
+          <a:bodyPr wrap="square">
+            <a:spAutoFit/>
+          </a:bodyPr>
+          <a:lstStyle/>
+          <a:p>
+            <a:r>
+              <a:rPr sz="1550" b="1" i="0">
+                <a:solidFill>
+                  <a:srgbClr val="006E96"/>
+                </a:solidFill>
+                <a:latin typeface="Arial"/>
+              </a:rPr>
+              <a:t>Each wave delivers something visible — not just groundwork.</a:t>
+            </a:r>
+          </a:p>
+        </p:txBody>
+      </p:sp>
+      <p:sp>
+        <p:nvSpPr>
+          <p:cNvPr id="21" name="TextBox 20"/>
+          <p:cNvSpPr txBox="1"/>
+          <p:nvPr/>
+        </p:nvSpPr>
+        <p:spPr>
+          <a:xfrm>
+            <a:off x="457200" y="6473952"/>
+            <a:ext cx="7772400" cy="292608"/>
+          </a:xfrm>
+          <a:prstGeom prst="rect">
+            <a:avLst/>
+          </a:prstGeom>
+          <a:noFill/>
+        </p:spPr>
+        <p:txBody>
+          <a:bodyPr wrap="square">
+            <a:spAutoFit/>
+          </a:bodyPr>
+          <a:lstStyle/>
+          <a:p>
+            <a:r>
+              <a:rPr sz="900" b="0" i="0">
+                <a:solidFill>
+                  <a:srgbClr val="595959"/>
+                </a:solidFill>
+                <a:latin typeface="Arial"/>
+              </a:rPr>
+              <a:t>4.6 · Phase 4, Plan — sequence the roadmap and cost it</a:t>
+            </a:r>
+          </a:p>
+        </p:txBody>
+      </p:sp>
+    </p:spTree>
+  </p:cSld>
+  <p:clrMapOvr>
+    <a:masterClrMapping/>
+  </p:clrMapOvr>
+</p:sld>
+</file>
+
+<file path=ppt/slides/slide46.xml><?xml version="1.0" encoding="utf-8"?>
+<p:sld xmlns:a="http://schemas.openxmlformats.org/drawingml/2006/main" xmlns:p="http://schemas.openxmlformats.org/presentationml/2006/main" xmlns:r="http://schemas.openxmlformats.org/officeDocument/2006/relationships">
+  <p:cSld>
+    <p:spTree>
+      <p:nvGrpSpPr>
+        <p:cNvPr id="1" name=""/>
+        <p:cNvGrpSpPr/>
+        <p:nvPr/>
+      </p:nvGrpSpPr>
+      <p:grpSpPr/>
+      <p:sp>
+        <p:nvSpPr>
+          <p:cNvPr id="2" name="Rectangle 1"/>
           <p:cNvSpPr/>
           <p:nvPr/>
         </p:nvSpPr>
         <p:spPr>
           <a:xfrm>
-            <a:off x="7452360" y="4690872"/>
-            <a:ext cx="3840480" cy="658368"/>
-          </a:xfrm>
-          <a:prstGeom prst="roundRect">
-            <a:avLst>
-              <a:gd name="adj" fmla="val 14000"/>
-            </a:avLst>
+            <a:off x="457200" y="384048"/>
+            <a:ext cx="45720" cy="256032"/>
+          </a:xfrm>
+          <a:prstGeom prst="rect">
+            <a:avLst/>
           </a:prstGeom>
           <a:solidFill>
-            <a:srgbClr val="006E96"/>
+            <a:srgbClr val="009CD6"/>
           </a:solidFill>
           <a:ln>
             <a:noFill/>
@@ -12245,32 +12813,23 @@
           </a:fontRef>
         </p:style>
         <p:txBody>
-          <a:bodyPr rtlCol="0" anchor="ctr" lIns="164592" wrap="square"/>
+          <a:bodyPr rtlCol="0" anchor="ctr"/>
           <a:lstStyle/>
           <a:p>
             <a:pPr algn="ctr"/>
-            <a:r>
-              <a:rPr sz="1500" b="1" i="0">
-                <a:solidFill>
-                  <a:srgbClr val="FFFFFF"/>
-                </a:solidFill>
-                <a:latin typeface="Arial"/>
-              </a:rPr>
-              <a:t>Execute &amp; Govern — the living EA</a:t>
-            </a:r>
-          </a:p>
-        </p:txBody>
-      </p:sp>
-      <p:sp>
-        <p:nvSpPr>
-          <p:cNvPr id="25" name="TextBox 24"/>
+          </a:p>
+        </p:txBody>
+      </p:sp>
+      <p:sp>
+        <p:nvSpPr>
+          <p:cNvPr id="3" name="TextBox 2"/>
           <p:cNvSpPr txBox="1"/>
           <p:nvPr/>
         </p:nvSpPr>
         <p:spPr>
           <a:xfrm>
-            <a:off x="7452360" y="5806440"/>
-            <a:ext cx="4297680" cy="731520"/>
+            <a:off x="621792" y="274320"/>
+            <a:ext cx="11247120" cy="914400"/>
           </a:xfrm>
           <a:prstGeom prst="rect">
             <a:avLst/>
@@ -12284,152 +12843,27 @@
           <a:lstStyle/>
           <a:p>
             <a:r>
-              <a:rPr sz="1200" b="0" i="0">
-                <a:solidFill>
-                  <a:srgbClr val="FFFFFF"/>
-                </a:solidFill>
-                <a:latin typeface="Arial"/>
-              </a:rPr>
-              <a:t>5 phases · 4 sign-offs · 6 deliverables · 1 worked sector</a:t>
-            </a:r>
-          </a:p>
-        </p:txBody>
-      </p:sp>
-    </p:spTree>
-    <p:extLst>
-      <p:ext uri="{BB962C8B-B14F-4D97-AF65-F5344CB8AC3E}">
-        <p14:creationId xmlns:p14="http://schemas.microsoft.com/office/powerpoint/2010/main" val="1196800265"/>
-      </p:ext>
-    </p:extLst>
-  </p:cSld>
-  <p:clrMapOvr>
-    <a:masterClrMapping/>
-  </p:clrMapOvr>
-</p:sld>
-</file>
-
-<file path=ppt/slides/slide38.xml><?xml version="1.0" encoding="utf-8"?>
-<p:sld xmlns:a="http://schemas.openxmlformats.org/drawingml/2006/main" xmlns:p="http://schemas.openxmlformats.org/presentationml/2006/main" xmlns:r="http://schemas.openxmlformats.org/officeDocument/2006/relationships">
-  <p:cSld>
-    <p:spTree>
-      <p:nvGrpSpPr>
-        <p:cNvPr id="1" name=""/>
-        <p:cNvGrpSpPr/>
-        <p:nvPr/>
-      </p:nvGrpSpPr>
-      <p:grpSpPr/>
-      <p:sp>
-        <p:nvSpPr>
-          <p:cNvPr id="2" name="TextBox 1"/>
-          <p:cNvSpPr txBox="1"/>
-          <p:nvPr/>
-        </p:nvSpPr>
-        <p:spPr>
-          <a:xfrm>
-            <a:off x="822960" y="822960"/>
-            <a:ext cx="7315200" cy="457200"/>
-          </a:xfrm>
-          <a:prstGeom prst="rect">
-            <a:avLst/>
-          </a:prstGeom>
-          <a:noFill/>
-        </p:spPr>
-        <p:txBody>
-          <a:bodyPr wrap="square">
-            <a:spAutoFit/>
-          </a:bodyPr>
-          <a:lstStyle/>
-          <a:p>
-            <a:r>
-              <a:rPr sz="1200" b="1" i="0">
-                <a:solidFill>
-                  <a:srgbClr val="595959"/>
-                </a:solidFill>
-                <a:latin typeface="Arial"/>
-              </a:rPr>
-              <a:t>KP1 · MODULE 4 · VIDEO 4.6</a:t>
-            </a:r>
-          </a:p>
-        </p:txBody>
-      </p:sp>
-      <p:sp>
-        <p:nvSpPr>
-          <p:cNvPr id="3" name="TextBox 2"/>
-          <p:cNvSpPr txBox="1"/>
-          <p:nvPr/>
-        </p:nvSpPr>
-        <p:spPr>
-          <a:xfrm>
-            <a:off x="822960" y="1828800"/>
-            <a:ext cx="2011680" cy="1097280"/>
-          </a:xfrm>
-          <a:prstGeom prst="rect">
-            <a:avLst/>
-          </a:prstGeom>
-          <a:noFill/>
-        </p:spPr>
-        <p:txBody>
-          <a:bodyPr wrap="square">
-            <a:spAutoFit/>
-          </a:bodyPr>
-          <a:lstStyle/>
-          <a:p>
-            <a:r>
-              <a:rPr sz="6000" b="1" i="0">
-                <a:solidFill>
-                  <a:srgbClr val="009CD6"/>
-                </a:solidFill>
-                <a:latin typeface="Arial"/>
-              </a:rPr>
-              <a:t>4.6</a:t>
-            </a:r>
-          </a:p>
-        </p:txBody>
-      </p:sp>
-      <p:sp>
-        <p:nvSpPr>
-          <p:cNvPr id="4" name="TextBox 3"/>
-          <p:cNvSpPr txBox="1"/>
-          <p:nvPr/>
-        </p:nvSpPr>
-        <p:spPr>
-          <a:xfrm>
-            <a:off x="822960" y="2880360"/>
-            <a:ext cx="9601200" cy="1371600"/>
-          </a:xfrm>
-          <a:prstGeom prst="rect">
-            <a:avLst/>
-          </a:prstGeom>
-          <a:noFill/>
-        </p:spPr>
-        <p:txBody>
-          <a:bodyPr wrap="square">
-            <a:spAutoFit/>
-          </a:bodyPr>
-          <a:lstStyle/>
-          <a:p>
-            <a:r>
-              <a:rPr sz="3400" b="1" i="0">
+              <a:rPr sz="2800" b="1" i="0">
                 <a:solidFill>
                   <a:srgbClr val="1A1A1A"/>
                 </a:solidFill>
                 <a:latin typeface="Arial"/>
               </a:rPr>
-              <a:t>Phase 4, Plan — sequence the roadmap and cost it</a:t>
-            </a:r>
-          </a:p>
-        </p:txBody>
-      </p:sp>
-      <p:sp>
-        <p:nvSpPr>
-          <p:cNvPr id="5" name="TextBox 4"/>
+              <a:t>Cost each wave honestly — directional estimates, not quotations</a:t>
+            </a:r>
+          </a:p>
+        </p:txBody>
+      </p:sp>
+      <p:sp>
+        <p:nvSpPr>
+          <p:cNvPr id="4" name="TextBox 3"/>
           <p:cNvSpPr txBox="1"/>
           <p:nvPr/>
         </p:nvSpPr>
         <p:spPr>
           <a:xfrm>
-            <a:off x="822960" y="4343400"/>
-            <a:ext cx="9875520" cy="1554480"/>
+            <a:off x="658368" y="1600200"/>
+            <a:ext cx="10881360" cy="2651760"/>
           </a:xfrm>
           <a:prstGeom prst="rect">
             <a:avLst/>
@@ -12442,86 +12876,57 @@
           </a:bodyPr>
           <a:lstStyle/>
           <a:p>
-            <a:r>
-              <a:rPr sz="1700" b="0" i="1">
+            <a:pPr>
+              <a:spcAft>
+                <a:spcPts val="1200"/>
+              </a:spcAft>
+            </a:pPr>
+            <a:r>
+              <a:rPr sz="2000" b="0" i="0">
                 <a:solidFill>
-                  <a:srgbClr val="595959"/>
+                  <a:srgbClr val="1A1A1A"/>
                 </a:solidFill>
                 <a:latin typeface="Arial"/>
               </a:rPr>
-              <a:t>Plan turns Progressa's decisions into a sequenced, costed roadmap in waves — the deliverable the minister takes to cabinet — signed off with budget committed.</a:t>
-            </a:r>
-          </a:p>
-        </p:txBody>
-      </p:sp>
-      <p:sp>
-        <p:nvSpPr>
-          <p:cNvPr id="6" name="TextBox 5"/>
-          <p:cNvSpPr txBox="1"/>
-          <p:nvPr/>
-        </p:nvSpPr>
-        <p:spPr>
-          <a:xfrm>
-            <a:off x="822960" y="5989320"/>
-            <a:ext cx="7315200" cy="365760"/>
-          </a:xfrm>
-          <a:prstGeom prst="rect">
-            <a:avLst/>
-          </a:prstGeom>
-          <a:noFill/>
-        </p:spPr>
-        <p:txBody>
-          <a:bodyPr wrap="square">
-            <a:spAutoFit/>
-          </a:bodyPr>
-          <a:lstStyle/>
-          <a:p>
-            <a:r>
-              <a:rPr sz="1200" b="0" i="0">
+              <a:t>Wave one is mostly people: the initial engagement and the small permanent EA team. Wave two adds the integration work connecting the authorities to the registries. Wave three is the backbone investment.</a:t>
+            </a:r>
+          </a:p>
+          <a:p>
+            <a:pPr>
+              <a:spcAft>
+                <a:spcPts val="1200"/>
+              </a:spcAft>
+            </a:pPr>
+            <a:r>
+              <a:rPr sz="2000" b="0" i="0">
                 <a:solidFill>
-                  <a:srgbClr val="595959"/>
+                  <a:srgbClr val="1A1A1A"/>
                 </a:solidFill>
                 <a:latin typeface="Arial"/>
               </a:rPr>
-              <a:t>~4 minutes · standalone video · voice-over on text slides</a:t>
-            </a:r>
-          </a:p>
-        </p:txBody>
-      </p:sp>
-    </p:spTree>
-  </p:cSld>
-  <p:clrMapOvr>
-    <a:masterClrMapping/>
-  </p:clrMapOvr>
-</p:sld>
-</file>
-
-<file path=ppt/slides/slide39.xml><?xml version="1.0" encoding="utf-8"?>
-<p:sld xmlns:a="http://schemas.openxmlformats.org/drawingml/2006/main" xmlns:p="http://schemas.openxmlformats.org/presentationml/2006/main" xmlns:r="http://schemas.openxmlformats.org/officeDocument/2006/relationships">
-  <p:cSld>
-    <p:spTree>
-      <p:nvGrpSpPr>
-        <p:cNvPr id="1" name=""/>
-        <p:cNvGrpSpPr/>
-        <p:nvPr/>
-      </p:nvGrpSpPr>
-      <p:grpSpPr/>
-      <p:sp>
-        <p:nvSpPr>
-          <p:cNvPr id="2" name="Rectangle 1"/>
+              <a:t>Directional is enough for cabinet to commit a five-year envelope, rather than an annual line that vanishes.</a:t>
+            </a:r>
+          </a:p>
+        </p:txBody>
+      </p:sp>
+      <p:sp>
+        <p:nvSpPr>
+          <p:cNvPr id="5" name="Rounded Rectangle 4"/>
           <p:cNvSpPr/>
           <p:nvPr/>
         </p:nvSpPr>
         <p:spPr>
           <a:xfrm>
-            <a:off x="457200" y="384048"/>
-            <a:ext cx="45720" cy="256032"/>
-          </a:xfrm>
-          <a:prstGeom prst="rect">
-            <a:avLst/>
+            <a:off x="658368" y="4434840"/>
+            <a:ext cx="10881360" cy="1325880"/>
+          </a:xfrm>
+          <a:prstGeom prst="roundRect">
+            <a:avLst>
+              <a:gd name="adj" fmla="val 4500"/>
+            </a:avLst>
           </a:prstGeom>
           <a:solidFill>
-            <a:srgbClr val="009CD6"/>
+            <a:srgbClr val="E5F5FB"/>
           </a:solidFill>
           <a:ln>
             <a:noFill/>
@@ -12552,14 +12957,14 @@
       </p:sp>
       <p:sp>
         <p:nvSpPr>
-          <p:cNvPr id="3" name="TextBox 2"/>
+          <p:cNvPr id="6" name="TextBox 5"/>
           <p:cNvSpPr txBox="1"/>
           <p:nvPr/>
         </p:nvSpPr>
         <p:spPr>
           <a:xfrm>
-            <a:off x="621792" y="274320"/>
-            <a:ext cx="11247120" cy="914400"/>
+            <a:off x="859536" y="4626864"/>
+            <a:ext cx="10479024" cy="1051560"/>
           </a:xfrm>
           <a:prstGeom prst="rect">
             <a:avLst/>
@@ -12572,36 +12977,91 @@
           </a:bodyPr>
           <a:lstStyle/>
           <a:p>
-            <a:r>
-              <a:rPr sz="2800" b="1" i="0">
+            <a:pPr>
+              <a:spcAft>
+                <a:spcPts val="700"/>
+              </a:spcAft>
+            </a:pPr>
+            <a:r>
+              <a:rPr sz="2300" b="1" i="0">
                 <a:solidFill>
-                  <a:srgbClr val="1A1A1A"/>
+                  <a:srgbClr val="006E96"/>
                 </a:solidFill>
                 <a:latin typeface="Arial"/>
               </a:rPr>
-              <a:t>Four waves, and each one delivers something the minister can show</a:t>
-            </a:r>
-          </a:p>
-        </p:txBody>
-      </p:sp>
-      <p:sp>
-        <p:nvSpPr>
-          <p:cNvPr id="4" name="Rounded Rectangle 3"/>
+              <a:t>The promised single learner record lands in Wave 2 — inside the first year.</a:t>
+            </a:r>
+          </a:p>
+        </p:txBody>
+      </p:sp>
+      <p:sp>
+        <p:nvSpPr>
+          <p:cNvPr id="7" name="TextBox 6"/>
+          <p:cNvSpPr txBox="1"/>
+          <p:nvPr/>
+        </p:nvSpPr>
+        <p:spPr>
+          <a:xfrm>
+            <a:off x="457200" y="6473952"/>
+            <a:ext cx="7772400" cy="292608"/>
+          </a:xfrm>
+          <a:prstGeom prst="rect">
+            <a:avLst/>
+          </a:prstGeom>
+          <a:noFill/>
+        </p:spPr>
+        <p:txBody>
+          <a:bodyPr wrap="square">
+            <a:spAutoFit/>
+          </a:bodyPr>
+          <a:lstStyle/>
+          <a:p>
+            <a:r>
+              <a:rPr sz="900" b="0" i="0">
+                <a:solidFill>
+                  <a:srgbClr val="595959"/>
+                </a:solidFill>
+                <a:latin typeface="Arial"/>
+              </a:rPr>
+              <a:t>4.6 · Phase 4, Plan — sequence the roadmap and cost it</a:t>
+            </a:r>
+          </a:p>
+        </p:txBody>
+      </p:sp>
+    </p:spTree>
+  </p:cSld>
+  <p:clrMapOvr>
+    <a:masterClrMapping/>
+  </p:clrMapOvr>
+</p:sld>
+</file>
+
+<file path=ppt/slides/slide47.xml><?xml version="1.0" encoding="utf-8"?>
+<p:sld xmlns:a="http://schemas.openxmlformats.org/drawingml/2006/main" xmlns:p="http://schemas.openxmlformats.org/presentationml/2006/main" xmlns:r="http://schemas.openxmlformats.org/officeDocument/2006/relationships">
+  <p:cSld>
+    <p:spTree>
+      <p:nvGrpSpPr>
+        <p:cNvPr id="1" name=""/>
+        <p:cNvGrpSpPr/>
+        <p:nvPr/>
+      </p:nvGrpSpPr>
+      <p:grpSpPr/>
+      <p:sp>
+        <p:nvSpPr>
+          <p:cNvPr id="2" name="Rectangle 1"/>
           <p:cNvSpPr/>
           <p:nvPr/>
         </p:nvSpPr>
         <p:spPr>
           <a:xfrm>
-            <a:off x="658368" y="1536192"/>
-            <a:ext cx="10881360" cy="960120"/>
-          </a:xfrm>
-          <a:prstGeom prst="roundRect">
-            <a:avLst>
-              <a:gd name="adj" fmla="val 4500"/>
-            </a:avLst>
+            <a:off x="457200" y="384048"/>
+            <a:ext cx="45720" cy="256032"/>
+          </a:xfrm>
+          <a:prstGeom prst="rect">
+            <a:avLst/>
           </a:prstGeom>
           <a:solidFill>
-            <a:srgbClr val="E5F5FB"/>
+            <a:srgbClr val="009CD6"/>
           </a:solidFill>
           <a:ln>
             <a:noFill/>
@@ -12632,14 +13092,14 @@
       </p:sp>
       <p:sp>
         <p:nvSpPr>
-          <p:cNvPr id="5" name="TextBox 4"/>
+          <p:cNvPr id="3" name="TextBox 2"/>
           <p:cNvSpPr txBox="1"/>
           <p:nvPr/>
         </p:nvSpPr>
         <p:spPr>
           <a:xfrm>
-            <a:off x="896112" y="1682495"/>
-            <a:ext cx="1371600" cy="320040"/>
+            <a:off x="621792" y="274320"/>
+            <a:ext cx="11247120" cy="914400"/>
           </a:xfrm>
           <a:prstGeom prst="rect">
             <a:avLst/>
@@ -12653,95 +13113,27 @@
           <a:lstStyle/>
           <a:p>
             <a:r>
-              <a:rPr sz="1200" b="1" i="0">
-                <a:solidFill>
-                  <a:srgbClr val="006E96"/>
-                </a:solidFill>
-                <a:latin typeface="Arial"/>
-              </a:rPr>
-              <a:t>WAVE 1</a:t>
-            </a:r>
-          </a:p>
-        </p:txBody>
-      </p:sp>
-      <p:sp>
-        <p:nvSpPr>
-          <p:cNvPr id="6" name="TextBox 5"/>
-          <p:cNvSpPr txBox="1"/>
-          <p:nvPr/>
-        </p:nvSpPr>
-        <p:spPr>
-          <a:xfrm>
-            <a:off x="896112" y="1993391"/>
-            <a:ext cx="3840480" cy="411480"/>
-          </a:xfrm>
-          <a:prstGeom prst="rect">
-            <a:avLst/>
-          </a:prstGeom>
-          <a:noFill/>
-        </p:spPr>
-        <p:txBody>
-          <a:bodyPr wrap="square">
-            <a:spAutoFit/>
-          </a:bodyPr>
-          <a:lstStyle/>
-          <a:p>
-            <a:r>
-              <a:rPr sz="1900" b="1" i="0">
+              <a:rPr sz="2800" b="1" i="0">
                 <a:solidFill>
                   <a:srgbClr val="1A1A1A"/>
                 </a:solidFill>
                 <a:latin typeface="Arial"/>
               </a:rPr>
-              <a:t>Inception</a:t>
-            </a:r>
-          </a:p>
-        </p:txBody>
-      </p:sp>
-      <p:sp>
-        <p:nvSpPr>
-          <p:cNvPr id="7" name="TextBox 6"/>
-          <p:cNvSpPr txBox="1"/>
-          <p:nvPr/>
-        </p:nvSpPr>
-        <p:spPr>
-          <a:xfrm>
-            <a:off x="5029200" y="1737360"/>
-            <a:ext cx="6309360" cy="640080"/>
-          </a:xfrm>
-          <a:prstGeom prst="rect">
-            <a:avLst/>
-          </a:prstGeom>
-          <a:noFill/>
-        </p:spPr>
-        <p:txBody>
-          <a:bodyPr wrap="square">
-            <a:spAutoFit/>
-          </a:bodyPr>
-          <a:lstStyle/>
-          <a:p>
-            <a:r>
-              <a:rPr sz="1550" b="0" i="0">
-                <a:solidFill>
-                  <a:srgbClr val="1A1A1A"/>
-                </a:solidFill>
-                <a:latin typeface="Arial"/>
-              </a:rPr>
-              <a:t>Stand up the repository and the Board; make the Learner Registry authoritative.</a:t>
-            </a:r>
-          </a:p>
-        </p:txBody>
-      </p:sp>
-      <p:sp>
-        <p:nvSpPr>
-          <p:cNvPr id="8" name="Rounded Rectangle 7"/>
+              <a:t>The roadmap is the one page both sides point at</a:t>
+            </a:r>
+          </a:p>
+        </p:txBody>
+      </p:sp>
+      <p:sp>
+        <p:nvSpPr>
+          <p:cNvPr id="4" name="Rounded Rectangle 3"/>
           <p:cNvSpPr/>
           <p:nvPr/>
         </p:nvSpPr>
         <p:spPr>
           <a:xfrm>
-            <a:off x="658368" y="2587752"/>
-            <a:ext cx="10881360" cy="960120"/>
+            <a:off x="658368" y="1554480"/>
+            <a:ext cx="5394960" cy="2377440"/>
           </a:xfrm>
           <a:prstGeom prst="roundRect">
             <a:avLst>
@@ -12780,14 +13172,14 @@
       </p:sp>
       <p:sp>
         <p:nvSpPr>
-          <p:cNvPr id="9" name="TextBox 8"/>
+          <p:cNvPr id="5" name="TextBox 4"/>
           <p:cNvSpPr txBox="1"/>
           <p:nvPr/>
         </p:nvSpPr>
         <p:spPr>
           <a:xfrm>
-            <a:off x="896112" y="2734056"/>
-            <a:ext cx="1371600" cy="320040"/>
+            <a:off x="859536" y="1700784"/>
+            <a:ext cx="4992624" cy="2103120"/>
           </a:xfrm>
           <a:prstGeom prst="rect">
             <a:avLst/>
@@ -12800,96 +13192,65 @@
           </a:bodyPr>
           <a:lstStyle/>
           <a:p>
-            <a:r>
-              <a:rPr sz="1200" b="1" i="0">
+            <a:pPr>
+              <a:spcAft>
+                <a:spcPts val="700"/>
+              </a:spcAft>
+            </a:pPr>
+            <a:r>
+              <a:rPr sz="1900" b="1" i="0">
                 <a:solidFill>
                   <a:srgbClr val="006E96"/>
                 </a:solidFill>
                 <a:latin typeface="Arial"/>
               </a:rPr>
-              <a:t>WAVE 2</a:t>
-            </a:r>
-          </a:p>
-        </p:txBody>
-      </p:sp>
-      <p:sp>
-        <p:nvSpPr>
-          <p:cNvPr id="10" name="TextBox 9"/>
-          <p:cNvSpPr txBox="1"/>
-          <p:nvPr/>
-        </p:nvSpPr>
-        <p:spPr>
-          <a:xfrm>
-            <a:off x="896112" y="3044952"/>
-            <a:ext cx="3840480" cy="411480"/>
-          </a:xfrm>
-          <a:prstGeom prst="rect">
-            <a:avLst/>
-          </a:prstGeom>
-          <a:noFill/>
-        </p:spPr>
-        <p:txBody>
-          <a:bodyPr wrap="square">
-            <a:spAutoFit/>
-          </a:bodyPr>
-          <a:lstStyle/>
-          <a:p>
-            <a:r>
-              <a:rPr sz="1900" b="1" i="0">
+              <a:t>THE MINISTER READS</a:t>
+            </a:r>
+          </a:p>
+          <a:p>
+            <a:pPr>
+              <a:spcAft>
+                <a:spcPts val="700"/>
+              </a:spcAft>
+            </a:pPr>
+            <a:r>
+              <a:rPr sz="1600" b="0" i="0">
                 <a:solidFill>
                   <a:srgbClr val="1A1A1A"/>
                 </a:solidFill>
                 <a:latin typeface="Arial"/>
               </a:rPr>
-              <a:t>High-priority use case</a:t>
-            </a:r>
-          </a:p>
-        </p:txBody>
-      </p:sp>
-      <p:sp>
-        <p:nvSpPr>
-          <p:cNvPr id="11" name="TextBox 10"/>
-          <p:cNvSpPr txBox="1"/>
-          <p:nvPr/>
-        </p:nvSpPr>
-        <p:spPr>
-          <a:xfrm>
-            <a:off x="5029200" y="2788920"/>
-            <a:ext cx="6309360" cy="640080"/>
-          </a:xfrm>
-          <a:prstGeom prst="rect">
-            <a:avLst/>
-          </a:prstGeom>
-          <a:noFill/>
-        </p:spPr>
-        <p:txBody>
-          <a:bodyPr wrap="square">
-            <a:spAutoFit/>
-          </a:bodyPr>
-          <a:lstStyle/>
-          <a:p>
-            <a:r>
-              <a:rPr sz="1550" b="0" i="0">
+              <a:t>Outcomes and dates.</a:t>
+            </a:r>
+          </a:p>
+          <a:p>
+            <a:pPr>
+              <a:spcAft>
+                <a:spcPts val="700"/>
+              </a:spcAft>
+            </a:pPr>
+            <a:r>
+              <a:rPr sz="1600" b="0" i="0">
                 <a:solidFill>
                   <a:srgbClr val="1A1A1A"/>
                 </a:solidFill>
                 <a:latin typeface="Arial"/>
               </a:rPr>
-              <a:t>The single learner record — PNEA and the grant programme consume PLR and PNIA.</a:t>
-            </a:r>
-          </a:p>
-        </p:txBody>
-      </p:sp>
-      <p:sp>
-        <p:nvSpPr>
-          <p:cNvPr id="12" name="Rounded Rectangle 11"/>
+              <a:t>The single learner record by next year.</a:t>
+            </a:r>
+          </a:p>
+        </p:txBody>
+      </p:sp>
+      <p:sp>
+        <p:nvSpPr>
+          <p:cNvPr id="6" name="Rounded Rectangle 5"/>
           <p:cNvSpPr/>
           <p:nvPr/>
         </p:nvSpPr>
         <p:spPr>
           <a:xfrm>
-            <a:off x="658368" y="3639312"/>
-            <a:ext cx="10881360" cy="960120"/>
+            <a:off x="6263640" y="1554480"/>
+            <a:ext cx="5394960" cy="2377440"/>
           </a:xfrm>
           <a:prstGeom prst="roundRect">
             <a:avLst>
@@ -12897,7 +13258,7 @@
             </a:avLst>
           </a:prstGeom>
           <a:solidFill>
-            <a:srgbClr val="E5F5FB"/>
+            <a:srgbClr val="F2F2F2"/>
           </a:solidFill>
           <a:ln>
             <a:noFill/>
@@ -12928,14 +13289,14 @@
       </p:sp>
       <p:sp>
         <p:nvSpPr>
-          <p:cNvPr id="13" name="TextBox 12"/>
+          <p:cNvPr id="7" name="TextBox 6"/>
           <p:cNvSpPr txBox="1"/>
           <p:nvPr/>
         </p:nvSpPr>
         <p:spPr>
           <a:xfrm>
-            <a:off x="896112" y="3785615"/>
-            <a:ext cx="1371600" cy="320040"/>
+            <a:off x="6464808" y="1700784"/>
+            <a:ext cx="4992624" cy="2103120"/>
           </a:xfrm>
           <a:prstGeom prst="rect">
             <a:avLst/>
@@ -12948,104 +13309,157 @@
           </a:bodyPr>
           <a:lstStyle/>
           <a:p>
-            <a:r>
-              <a:rPr sz="1200" b="1" i="0">
+            <a:pPr>
+              <a:spcAft>
+                <a:spcPts val="700"/>
+              </a:spcAft>
+            </a:pPr>
+            <a:r>
+              <a:rPr sz="1900" b="1" i="0">
                 <a:solidFill>
                   <a:srgbClr val="006E96"/>
                 </a:solidFill>
                 <a:latin typeface="Arial"/>
               </a:rPr>
-              <a:t>WAVE 3</a:t>
-            </a:r>
-          </a:p>
-        </p:txBody>
-      </p:sp>
-      <p:sp>
-        <p:nvSpPr>
-          <p:cNvPr id="14" name="TextBox 13"/>
-          <p:cNvSpPr txBox="1"/>
-          <p:nvPr/>
-        </p:nvSpPr>
-        <p:spPr>
-          <a:xfrm>
-            <a:off x="896112" y="4096512"/>
-            <a:ext cx="3840480" cy="411480"/>
-          </a:xfrm>
-          <a:prstGeom prst="rect">
-            <a:avLst/>
-          </a:prstGeom>
-          <a:noFill/>
-        </p:spPr>
-        <p:txBody>
-          <a:bodyPr wrap="square">
-            <a:spAutoFit/>
-          </a:bodyPr>
-          <a:lstStyle/>
-          <a:p>
-            <a:r>
-              <a:rPr sz="1900" b="1" i="0">
+              <a:t>THE ARCHITECT READS</a:t>
+            </a:r>
+          </a:p>
+          <a:p>
+            <a:pPr>
+              <a:spcAft>
+                <a:spcPts val="700"/>
+              </a:spcAft>
+            </a:pPr>
+            <a:r>
+              <a:rPr sz="1600" b="0" i="0">
                 <a:solidFill>
                   <a:srgbClr val="1A1A1A"/>
                 </a:solidFill>
                 <a:latin typeface="Arial"/>
               </a:rPr>
-              <a:t>The shared backbone</a:t>
-            </a:r>
-          </a:p>
-        </p:txBody>
-      </p:sp>
-      <p:sp>
-        <p:nvSpPr>
-          <p:cNvPr id="15" name="TextBox 14"/>
-          <p:cNvSpPr txBox="1"/>
-          <p:nvPr/>
-        </p:nvSpPr>
-        <p:spPr>
-          <a:xfrm>
-            <a:off x="5029200" y="3840480"/>
-            <a:ext cx="6309360" cy="640080"/>
-          </a:xfrm>
-          <a:prstGeom prst="rect">
-            <a:avLst/>
-          </a:prstGeom>
-          <a:noFill/>
-        </p:spPr>
-        <p:txBody>
-          <a:bodyPr wrap="square">
-            <a:spAutoFit/>
-          </a:bodyPr>
-          <a:lstStyle/>
-          <a:p>
-            <a:r>
-              <a:rPr sz="1550" b="0" i="0">
+              <a:t>The sequence and its dependencies.</a:t>
+            </a:r>
+          </a:p>
+          <a:p>
+            <a:pPr>
+              <a:spcAft>
+                <a:spcPts val="700"/>
+              </a:spcAft>
+            </a:pPr>
+            <a:r>
+              <a:rPr sz="1600" b="0" i="0">
                 <a:solidFill>
                   <a:srgbClr val="1A1A1A"/>
                 </a:solidFill>
                 <a:latin typeface="Arial"/>
               </a:rPr>
-              <a:t>Build out PDGA’s data-exchange backbone.</a:t>
-            </a:r>
-          </a:p>
-        </p:txBody>
-      </p:sp>
-      <p:sp>
-        <p:nvSpPr>
-          <p:cNvPr id="16" name="Rounded Rectangle 15"/>
+              <a:t>Wave 2 cannot start until PLR is authoritative in Wave 1.</a:t>
+            </a:r>
+          </a:p>
+        </p:txBody>
+      </p:sp>
+      <p:sp>
+        <p:nvSpPr>
+          <p:cNvPr id="8" name="TextBox 7"/>
+          <p:cNvSpPr txBox="1"/>
+          <p:nvPr/>
+        </p:nvSpPr>
+        <p:spPr>
+          <a:xfrm>
+            <a:off x="658368" y="4114800"/>
+            <a:ext cx="10881360" cy="548640"/>
+          </a:xfrm>
+          <a:prstGeom prst="rect">
+            <a:avLst/>
+          </a:prstGeom>
+          <a:noFill/>
+        </p:spPr>
+        <p:txBody>
+          <a:bodyPr wrap="square">
+            <a:spAutoFit/>
+          </a:bodyPr>
+          <a:lstStyle/>
+          <a:p>
+            <a:r>
+              <a:rPr sz="1550" b="1" i="0">
+                <a:solidFill>
+                  <a:srgbClr val="006E96"/>
+                </a:solidFill>
+                <a:latin typeface="Arial"/>
+              </a:rPr>
+              <a:t>Same page, two readings, no translation lost.</a:t>
+            </a:r>
+          </a:p>
+        </p:txBody>
+      </p:sp>
+      <p:sp>
+        <p:nvSpPr>
+          <p:cNvPr id="9" name="TextBox 8"/>
+          <p:cNvSpPr txBox="1"/>
+          <p:nvPr/>
+        </p:nvSpPr>
+        <p:spPr>
+          <a:xfrm>
+            <a:off x="457200" y="6473952"/>
+            <a:ext cx="7772400" cy="292608"/>
+          </a:xfrm>
+          <a:prstGeom prst="rect">
+            <a:avLst/>
+          </a:prstGeom>
+          <a:noFill/>
+        </p:spPr>
+        <p:txBody>
+          <a:bodyPr wrap="square">
+            <a:spAutoFit/>
+          </a:bodyPr>
+          <a:lstStyle/>
+          <a:p>
+            <a:r>
+              <a:rPr sz="900" b="0" i="0">
+                <a:solidFill>
+                  <a:srgbClr val="595959"/>
+                </a:solidFill>
+                <a:latin typeface="Arial"/>
+              </a:rPr>
+              <a:t>4.6 · Phase 4, Plan — sequence the roadmap and cost it</a:t>
+            </a:r>
+          </a:p>
+        </p:txBody>
+      </p:sp>
+    </p:spTree>
+  </p:cSld>
+  <p:clrMapOvr>
+    <a:masterClrMapping/>
+  </p:clrMapOvr>
+</p:sld>
+</file>
+
+<file path=ppt/slides/slide48.xml><?xml version="1.0" encoding="utf-8"?>
+<p:sld xmlns:a="http://schemas.openxmlformats.org/drawingml/2006/main" xmlns:p="http://schemas.openxmlformats.org/presentationml/2006/main" xmlns:r="http://schemas.openxmlformats.org/officeDocument/2006/relationships">
+  <p:cSld>
+    <p:spTree>
+      <p:nvGrpSpPr>
+        <p:cNvPr id="1" name=""/>
+        <p:cNvGrpSpPr/>
+        <p:nvPr/>
+      </p:nvGrpSpPr>
+      <p:grpSpPr/>
+      <p:sp>
+        <p:nvSpPr>
+          <p:cNvPr id="2" name="Rectangle 1"/>
           <p:cNvSpPr/>
           <p:nvPr/>
         </p:nvSpPr>
         <p:spPr>
           <a:xfrm>
-            <a:off x="658368" y="4690872"/>
-            <a:ext cx="10881360" cy="960120"/>
-          </a:xfrm>
-          <a:prstGeom prst="roundRect">
-            <a:avLst>
-              <a:gd name="adj" fmla="val 4500"/>
-            </a:avLst>
+            <a:off x="457200" y="384048"/>
+            <a:ext cx="45720" cy="256032"/>
+          </a:xfrm>
+          <a:prstGeom prst="rect">
+            <a:avLst/>
           </a:prstGeom>
           <a:solidFill>
-            <a:srgbClr val="E5F5FB"/>
+            <a:srgbClr val="009CD6"/>
           </a:solidFill>
           <a:ln>
             <a:noFill/>
@@ -13076,14 +13490,14 @@
       </p:sp>
       <p:sp>
         <p:nvSpPr>
-          <p:cNvPr id="17" name="TextBox 16"/>
+          <p:cNvPr id="3" name="TextBox 2"/>
           <p:cNvSpPr txBox="1"/>
           <p:nvPr/>
         </p:nvSpPr>
         <p:spPr>
           <a:xfrm>
-            <a:off x="896112" y="4837176"/>
-            <a:ext cx="1371600" cy="320040"/>
+            <a:off x="621792" y="274320"/>
+            <a:ext cx="11247120" cy="914400"/>
           </a:xfrm>
           <a:prstGeom prst="rect">
             <a:avLst/>
@@ -13097,61 +13511,27 @@
           <a:lstStyle/>
           <a:p>
             <a:r>
-              <a:rPr sz="1200" b="1" i="0">
-                <a:solidFill>
-                  <a:srgbClr val="006E96"/>
-                </a:solidFill>
-                <a:latin typeface="Arial"/>
-              </a:rPr>
-              <a:t>WAVE 4</a:t>
-            </a:r>
-          </a:p>
-        </p:txBody>
-      </p:sp>
-      <p:sp>
-        <p:nvSpPr>
-          <p:cNvPr id="18" name="TextBox 17"/>
-          <p:cNvSpPr txBox="1"/>
-          <p:nvPr/>
-        </p:nvSpPr>
-        <p:spPr>
-          <a:xfrm>
-            <a:off x="896112" y="5148072"/>
-            <a:ext cx="3840480" cy="411480"/>
-          </a:xfrm>
-          <a:prstGeom prst="rect">
-            <a:avLst/>
-          </a:prstGeom>
-          <a:noFill/>
-        </p:spPr>
-        <p:txBody>
-          <a:bodyPr wrap="square">
-            <a:spAutoFit/>
-          </a:bodyPr>
-          <a:lstStyle/>
-          <a:p>
-            <a:r>
-              <a:rPr sz="1900" b="1" i="0">
+              <a:rPr sz="2800" b="1" i="0">
                 <a:solidFill>
                   <a:srgbClr val="1A1A1A"/>
                 </a:solidFill>
                 <a:latin typeface="Arial"/>
               </a:rPr>
-              <a:t>Mass scale</a:t>
-            </a:r>
-          </a:p>
-        </p:txBody>
-      </p:sp>
-      <p:sp>
-        <p:nvSpPr>
-          <p:cNvPr id="19" name="TextBox 18"/>
+              <a:t>Sign-off four is the most consequential gate of the four</a:t>
+            </a:r>
+          </a:p>
+        </p:txBody>
+      </p:sp>
+      <p:sp>
+        <p:nvSpPr>
+          <p:cNvPr id="4" name="TextBox 3"/>
           <p:cNvSpPr txBox="1"/>
           <p:nvPr/>
         </p:nvSpPr>
         <p:spPr>
           <a:xfrm>
-            <a:off x="5029200" y="4892040"/>
-            <a:ext cx="6309360" cy="640080"/>
+            <a:off x="658368" y="1600200"/>
+            <a:ext cx="10881360" cy="2651760"/>
           </a:xfrm>
           <a:prstGeom prst="rect">
             <a:avLst/>
@@ -13164,120 +13544,57 @@
           </a:bodyPr>
           <a:lstStyle/>
           <a:p>
-            <a:r>
-              <a:rPr sz="1550" b="0" i="0">
+            <a:pPr>
+              <a:spcAft>
+                <a:spcPts val="1200"/>
+              </a:spcAft>
+            </a:pPr>
+            <a:r>
+              <a:rPr sz="2000" b="0" i="0">
                 <a:solidFill>
                   <a:srgbClr val="1A1A1A"/>
                 </a:solidFill>
                 <a:latin typeface="Arial"/>
               </a:rPr>
-              <a:t>Every education service running on the backbone.</a:t>
-            </a:r>
-          </a:p>
-        </p:txBody>
-      </p:sp>
-      <p:sp>
-        <p:nvSpPr>
-          <p:cNvPr id="20" name="TextBox 19"/>
-          <p:cNvSpPr txBox="1"/>
-          <p:nvPr/>
-        </p:nvSpPr>
-        <p:spPr>
-          <a:xfrm>
-            <a:off x="658368" y="5806440"/>
-            <a:ext cx="10881360" cy="548640"/>
-          </a:xfrm>
-          <a:prstGeom prst="rect">
-            <a:avLst/>
-          </a:prstGeom>
-          <a:noFill/>
-        </p:spPr>
-        <p:txBody>
-          <a:bodyPr wrap="square">
-            <a:spAutoFit/>
-          </a:bodyPr>
-          <a:lstStyle/>
-          <a:p>
-            <a:r>
-              <a:rPr sz="1550" b="1" i="0">
+              <a:t>The decision-maker and the EA Board approve the roadmap and commit the budget — ideally a multi-year envelope, not an annual line. This is the deliverable the minister takes to cabinet.</a:t>
+            </a:r>
+          </a:p>
+          <a:p>
+            <a:pPr>
+              <a:spcAft>
+                <a:spcPts val="1200"/>
+              </a:spcAft>
+            </a:pPr>
+            <a:r>
+              <a:rPr sz="2000" b="0" i="0">
                 <a:solidFill>
-                  <a:srgbClr val="006E96"/>
+                  <a:srgbClr val="1A1A1A"/>
                 </a:solidFill>
                 <a:latin typeface="Arial"/>
               </a:rPr>
-              <a:t>Each wave delivers something visible — not just groundwork.</a:t>
-            </a:r>
-          </a:p>
-        </p:txBody>
-      </p:sp>
-      <p:sp>
-        <p:nvSpPr>
-          <p:cNvPr id="21" name="TextBox 20"/>
-          <p:cNvSpPr txBox="1"/>
-          <p:nvPr/>
-        </p:nvSpPr>
-        <p:spPr>
-          <a:xfrm>
-            <a:off x="457200" y="6473952"/>
-            <a:ext cx="7772400" cy="292608"/>
-          </a:xfrm>
-          <a:prstGeom prst="rect">
-            <a:avLst/>
-          </a:prstGeom>
-          <a:noFill/>
-        </p:spPr>
-        <p:txBody>
-          <a:bodyPr wrap="square">
-            <a:spAutoFit/>
-          </a:bodyPr>
-          <a:lstStyle/>
-          <a:p>
-            <a:r>
-              <a:rPr sz="900" b="0" i="0">
-                <a:solidFill>
-                  <a:srgbClr val="595959"/>
-                </a:solidFill>
-                <a:latin typeface="Arial"/>
-              </a:rPr>
-              <a:t>4.6 · Phase 4, Plan — sequence the roadmap and cost it</a:t>
-            </a:r>
-          </a:p>
-        </p:txBody>
-      </p:sp>
-    </p:spTree>
-  </p:cSld>
-  <p:clrMapOvr>
-    <a:masterClrMapping/>
-  </p:clrMapOvr>
-</p:sld>
-</file>
-
-<file path=ppt/slides/slide40.xml><?xml version="1.0" encoding="utf-8"?>
-<p:sld xmlns:a="http://schemas.openxmlformats.org/drawingml/2006/main" xmlns:p="http://schemas.openxmlformats.org/presentationml/2006/main" xmlns:r="http://schemas.openxmlformats.org/officeDocument/2006/relationships">
-  <p:cSld>
-    <p:spTree>
-      <p:nvGrpSpPr>
-        <p:cNvPr id="1" name=""/>
-        <p:cNvGrpSpPr/>
-        <p:nvPr/>
-      </p:nvGrpSpPr>
-      <p:grpSpPr/>
-      <p:sp>
-        <p:nvSpPr>
-          <p:cNvPr id="2" name="Rectangle 1"/>
+              <a:t>With it approved, Progressa moves from planning to building.</a:t>
+            </a:r>
+          </a:p>
+        </p:txBody>
+      </p:sp>
+      <p:sp>
+        <p:nvSpPr>
+          <p:cNvPr id="5" name="Rounded Rectangle 4"/>
           <p:cNvSpPr/>
           <p:nvPr/>
         </p:nvSpPr>
         <p:spPr>
           <a:xfrm>
-            <a:off x="457200" y="384048"/>
-            <a:ext cx="45720" cy="256032"/>
-          </a:xfrm>
-          <a:prstGeom prst="rect">
-            <a:avLst/>
+            <a:off x="658368" y="4434840"/>
+            <a:ext cx="10881360" cy="1325880"/>
+          </a:xfrm>
+          <a:prstGeom prst="roundRect">
+            <a:avLst>
+              <a:gd name="adj" fmla="val 4500"/>
+            </a:avLst>
           </a:prstGeom>
           <a:solidFill>
-            <a:srgbClr val="009CD6"/>
+            <a:srgbClr val="E5F5FB"/>
           </a:solidFill>
           <a:ln>
             <a:noFill/>
@@ -13308,14 +13625,14 @@
       </p:sp>
       <p:sp>
         <p:nvSpPr>
-          <p:cNvPr id="3" name="TextBox 2"/>
+          <p:cNvPr id="6" name="TextBox 5"/>
           <p:cNvSpPr txBox="1"/>
           <p:nvPr/>
         </p:nvSpPr>
         <p:spPr>
           <a:xfrm>
-            <a:off x="621792" y="274320"/>
-            <a:ext cx="11247120" cy="914400"/>
+            <a:off x="859536" y="4626864"/>
+            <a:ext cx="10479024" cy="1051560"/>
           </a:xfrm>
           <a:prstGeom prst="rect">
             <a:avLst/>
@@ -13328,28 +13645,119 @@
           </a:bodyPr>
           <a:lstStyle/>
           <a:p>
-            <a:r>
-              <a:rPr sz="2800" b="1" i="0">
+            <a:pPr>
+              <a:spcAft>
+                <a:spcPts val="700"/>
+              </a:spcAft>
+            </a:pPr>
+            <a:r>
+              <a:rPr sz="2300" b="1" i="0">
+                <a:solidFill>
+                  <a:srgbClr val="006E96"/>
+                </a:solidFill>
+                <a:latin typeface="Arial"/>
+              </a:rPr>
+              <a:t>Four sign-offs done, roughly six months from the first day of Discovery.</a:t>
+            </a:r>
+          </a:p>
+        </p:txBody>
+      </p:sp>
+      <p:sp>
+        <p:nvSpPr>
+          <p:cNvPr id="7" name="TextBox 6"/>
+          <p:cNvSpPr txBox="1"/>
+          <p:nvPr/>
+        </p:nvSpPr>
+        <p:spPr>
+          <a:xfrm>
+            <a:off x="457200" y="6473952"/>
+            <a:ext cx="7772400" cy="292608"/>
+          </a:xfrm>
+          <a:prstGeom prst="rect">
+            <a:avLst/>
+          </a:prstGeom>
+          <a:noFill/>
+        </p:spPr>
+        <p:txBody>
+          <a:bodyPr wrap="square">
+            <a:spAutoFit/>
+          </a:bodyPr>
+          <a:lstStyle/>
+          <a:p>
+            <a:r>
+              <a:rPr sz="900" b="0" i="0">
+                <a:solidFill>
+                  <a:srgbClr val="595959"/>
+                </a:solidFill>
+                <a:latin typeface="Arial"/>
+              </a:rPr>
+              <a:t>4.6 · Phase 4, Plan — sequence the roadmap and cost it</a:t>
+            </a:r>
+          </a:p>
+        </p:txBody>
+      </p:sp>
+    </p:spTree>
+  </p:cSld>
+  <p:clrMapOvr>
+    <a:masterClrMapping/>
+  </p:clrMapOvr>
+</p:sld>
+</file>
+
+<file path=ppt/slides/slide49.xml><?xml version="1.0" encoding="utf-8"?>
+<p:sld xmlns:a="http://schemas.openxmlformats.org/drawingml/2006/main" xmlns:p="http://schemas.openxmlformats.org/presentationml/2006/main" xmlns:r="http://schemas.openxmlformats.org/officeDocument/2006/relationships">
+  <p:cSld>
+    <p:spTree>
+      <p:nvGrpSpPr>
+        <p:cNvPr id="1" name=""/>
+        <p:cNvGrpSpPr/>
+        <p:nvPr/>
+      </p:nvGrpSpPr>
+      <p:grpSpPr/>
+      <p:sp>
+        <p:nvSpPr>
+          <p:cNvPr id="2" name="TextBox 1"/>
+          <p:cNvSpPr txBox="1"/>
+          <p:nvPr/>
+        </p:nvSpPr>
+        <p:spPr>
+          <a:xfrm>
+            <a:off x="1005840" y="2103120"/>
+            <a:ext cx="10149840" cy="2377440"/>
+          </a:xfrm>
+          <a:prstGeom prst="rect">
+            <a:avLst/>
+          </a:prstGeom>
+          <a:noFill/>
+        </p:spPr>
+        <p:txBody>
+          <a:bodyPr wrap="square">
+            <a:spAutoFit/>
+          </a:bodyPr>
+          <a:lstStyle/>
+          <a:p>
+            <a:r>
+              <a:rPr sz="3000" b="1" i="0">
                 <a:solidFill>
                   <a:srgbClr val="1A1A1A"/>
                 </a:solidFill>
                 <a:latin typeface="Arial"/>
               </a:rPr>
-              <a:t>Cost each wave honestly — directional estimates, not quotations</a:t>
-            </a:r>
-          </a:p>
-        </p:txBody>
-      </p:sp>
-      <p:sp>
-        <p:nvSpPr>
-          <p:cNvPr id="4" name="TextBox 3"/>
+              <a:t>Plan turns Progressa’s decisions into a wave-sequenced, costed roadmap — the cabinet-ready document business and IT both read — with the minister’s flagship landing inside the first year.</a:t>
+            </a:r>
+          </a:p>
+        </p:txBody>
+      </p:sp>
+      <p:sp>
+        <p:nvSpPr>
+          <p:cNvPr id="3" name="TextBox 2"/>
           <p:cNvSpPr txBox="1"/>
           <p:nvPr/>
         </p:nvSpPr>
         <p:spPr>
           <a:xfrm>
-            <a:off x="658368" y="1600200"/>
-            <a:ext cx="10881360" cy="2651760"/>
+            <a:off x="1005840" y="1554480"/>
+            <a:ext cx="5486400" cy="365760"/>
           </a:xfrm>
           <a:prstGeom prst="rect">
             <a:avLst/>
@@ -13362,49 +13770,28 @@
           </a:bodyPr>
           <a:lstStyle/>
           <a:p>
-            <a:pPr>
-              <a:spcAft>
-                <a:spcPts val="1200"/>
-              </a:spcAft>
-            </a:pPr>
-            <a:r>
-              <a:rPr sz="2000" b="0" i="0">
+            <a:r>
+              <a:rPr sz="1200" b="1" i="0">
                 <a:solidFill>
-                  <a:srgbClr val="1A1A1A"/>
+                  <a:srgbClr val="006E96"/>
                 </a:solidFill>
                 <a:latin typeface="Arial"/>
               </a:rPr>
-              <a:t>Wave one is mostly people: the initial engagement and the small permanent EA team. Wave two adds the integration work connecting the authorities to the registries. Wave three is the backbone investment.</a:t>
-            </a:r>
-          </a:p>
-          <a:p>
-            <a:pPr>
-              <a:spcAft>
-                <a:spcPts val="1200"/>
-              </a:spcAft>
-            </a:pPr>
-            <a:r>
-              <a:rPr sz="2000" b="0" i="0">
-                <a:solidFill>
-                  <a:srgbClr val="1A1A1A"/>
-                </a:solidFill>
-                <a:latin typeface="Arial"/>
-              </a:rPr>
-              <a:t>Directional is enough for cabinet to commit a five-year envelope, rather than an annual line that vanishes.</a:t>
-            </a:r>
-          </a:p>
-        </p:txBody>
-      </p:sp>
-      <p:sp>
-        <p:nvSpPr>
-          <p:cNvPr id="5" name="Rounded Rectangle 4"/>
+              <a:t>IN ONE SENTENCE</a:t>
+            </a:r>
+          </a:p>
+        </p:txBody>
+      </p:sp>
+      <p:sp>
+        <p:nvSpPr>
+          <p:cNvPr id="4" name="Rounded Rectangle 3"/>
           <p:cNvSpPr/>
           <p:nvPr/>
         </p:nvSpPr>
         <p:spPr>
           <a:xfrm>
-            <a:off x="658368" y="4434840"/>
-            <a:ext cx="10881360" cy="1325880"/>
+            <a:off x="658368" y="4709160"/>
+            <a:ext cx="10881360" cy="1554480"/>
           </a:xfrm>
           <a:prstGeom prst="roundRect">
             <a:avLst>
@@ -13412,10 +13799,12 @@
             </a:avLst>
           </a:prstGeom>
           <a:solidFill>
-            <a:srgbClr val="E5F5FB"/>
+            <a:srgbClr val="FFFFFF"/>
           </a:solidFill>
-          <a:ln>
-            <a:noFill/>
+          <a:ln w="9525">
+            <a:solidFill>
+              <a:srgbClr val="009CD6"/>
+            </a:solidFill>
           </a:ln>
           <a:effectLst/>
         </p:spPr>
@@ -13434,55 +13823,56 @@
           </a:fontRef>
         </p:style>
         <p:txBody>
-          <a:bodyPr rtlCol="0" anchor="ctr"/>
-          <a:lstStyle/>
-          <a:p>
-            <a:pPr algn="ctr"/>
-          </a:p>
-        </p:txBody>
-      </p:sp>
-      <p:sp>
-        <p:nvSpPr>
-          <p:cNvPr id="6" name="TextBox 5"/>
-          <p:cNvSpPr txBox="1"/>
-          <p:nvPr/>
-        </p:nvSpPr>
-        <p:spPr>
-          <a:xfrm>
-            <a:off x="859536" y="4626864"/>
-            <a:ext cx="10479024" cy="1051560"/>
-          </a:xfrm>
-          <a:prstGeom prst="rect">
-            <a:avLst/>
-          </a:prstGeom>
-          <a:noFill/>
-        </p:spPr>
-        <p:txBody>
-          <a:bodyPr wrap="square">
-            <a:spAutoFit/>
+          <a:bodyPr rtlCol="0" anchor="ctr" wrap="square" lIns="228600" rIns="228600" tIns="109728" bIns="109728">
+            <a:noAutofit/>
           </a:bodyPr>
           <a:lstStyle/>
           <a:p>
-            <a:pPr>
+            <a:pPr algn="l">
               <a:spcAft>
-                <a:spcPts val="700"/>
+                <a:spcPts val="400"/>
               </a:spcAft>
             </a:pPr>
             <a:r>
-              <a:rPr sz="2300" b="1" i="0">
+              <a:rPr sz="1800" b="1" i="0">
                 <a:solidFill>
                   <a:srgbClr val="006E96"/>
                 </a:solidFill>
                 <a:latin typeface="Arial"/>
               </a:rPr>
-              <a:t>The promised single learner record lands in Wave 2 — inside the first year.</a:t>
-            </a:r>
-          </a:p>
-        </p:txBody>
-      </p:sp>
-      <p:sp>
-        <p:nvSpPr>
-          <p:cNvPr id="7" name="TextBox 6"/>
+              <a:t>Do this on your own sector. </a:t>
+            </a:r>
+            <a:r>
+              <a:rPr sz="1800" b="1" i="0">
+                <a:solidFill>
+                  <a:srgbClr val="1A1A1A"/>
+                </a:solidFill>
+                <a:latin typeface="Arial"/>
+              </a:rPr>
+              <a:t>Sequence your roadmap into waves.</a:t>
+            </a:r>
+          </a:p>
+          <a:p>
+            <a:pPr algn="l">
+              <a:spcAft>
+                <a:spcPts val="400"/>
+              </a:spcAft>
+            </a:pPr>
+            <a:r>
+              <a:rPr sz="1800" b="0" i="0">
+                <a:solidFill>
+                  <a:srgbClr val="595959"/>
+                </a:solidFill>
+                <a:latin typeface="Arial"/>
+              </a:rPr>
+              <a:t>The prompt in the companion material gives you a four-wave roadmap with deliverables, dependencies and cost drivers. Before the next video.</a:t>
+            </a:r>
+          </a:p>
+        </p:txBody>
+      </p:sp>
+      <p:sp>
+        <p:nvSpPr>
+          <p:cNvPr id="5" name="TextBox 4"/>
           <p:cNvSpPr txBox="1"/>
           <p:nvPr/>
         </p:nvSpPr>
@@ -13510,6 +13900,41 @@
                 <a:latin typeface="Arial"/>
               </a:rPr>
               <a:t>4.6 · Phase 4, Plan — sequence the roadmap and cost it</a:t>
+            </a:r>
+          </a:p>
+        </p:txBody>
+      </p:sp>
+      <p:sp>
+        <p:nvSpPr>
+          <p:cNvPr id="6" name="TextBox 5"/>
+          <p:cNvSpPr txBox="1"/>
+          <p:nvPr/>
+        </p:nvSpPr>
+        <p:spPr>
+          <a:xfrm>
+            <a:off x="10058400" y="6473952"/>
+            <a:ext cx="1673352" cy="292608"/>
+          </a:xfrm>
+          <a:prstGeom prst="rect">
+            <a:avLst/>
+          </a:prstGeom>
+          <a:noFill/>
+        </p:spPr>
+        <p:txBody>
+          <a:bodyPr wrap="square">
+            <a:spAutoFit/>
+          </a:bodyPr>
+          <a:lstStyle/>
+          <a:p>
+            <a:pPr algn="r"/>
+            <a:r>
+              <a:rPr sz="900" b="0" i="0">
+                <a:solidFill>
+                  <a:srgbClr val="595959"/>
+                </a:solidFill>
+                <a:latin typeface="Arial"/>
+              </a:rPr>
+              <a:t>www.itu.int</a:t>
             </a:r>
           </a:p>
         </p:txBody>
@@ -13522,918 +13947,7 @@
 </p:sld>
 </file>
 
-<file path=ppt/slides/slide41.xml><?xml version="1.0" encoding="utf-8"?>
-<p:sld xmlns:a="http://schemas.openxmlformats.org/drawingml/2006/main" xmlns:p="http://schemas.openxmlformats.org/presentationml/2006/main" xmlns:r="http://schemas.openxmlformats.org/officeDocument/2006/relationships">
-  <p:cSld>
-    <p:spTree>
-      <p:nvGrpSpPr>
-        <p:cNvPr id="1" name=""/>
-        <p:cNvGrpSpPr/>
-        <p:nvPr/>
-      </p:nvGrpSpPr>
-      <p:grpSpPr/>
-      <p:sp>
-        <p:nvSpPr>
-          <p:cNvPr id="2" name="Rectangle 1"/>
-          <p:cNvSpPr/>
-          <p:nvPr/>
-        </p:nvSpPr>
-        <p:spPr>
-          <a:xfrm>
-            <a:off x="457200" y="384048"/>
-            <a:ext cx="45720" cy="256032"/>
-          </a:xfrm>
-          <a:prstGeom prst="rect">
-            <a:avLst/>
-          </a:prstGeom>
-          <a:solidFill>
-            <a:srgbClr val="009CD6"/>
-          </a:solidFill>
-          <a:ln>
-            <a:noFill/>
-          </a:ln>
-          <a:effectLst/>
-        </p:spPr>
-        <p:style>
-          <a:lnRef idx="1">
-            <a:schemeClr val="accent1"/>
-          </a:lnRef>
-          <a:fillRef idx="3">
-            <a:schemeClr val="accent1"/>
-          </a:fillRef>
-          <a:effectRef idx="2">
-            <a:schemeClr val="accent1"/>
-          </a:effectRef>
-          <a:fontRef idx="minor">
-            <a:schemeClr val="lt1"/>
-          </a:fontRef>
-        </p:style>
-        <p:txBody>
-          <a:bodyPr rtlCol="0" anchor="ctr"/>
-          <a:lstStyle/>
-          <a:p>
-            <a:pPr algn="ctr"/>
-          </a:p>
-        </p:txBody>
-      </p:sp>
-      <p:sp>
-        <p:nvSpPr>
-          <p:cNvPr id="3" name="TextBox 2"/>
-          <p:cNvSpPr txBox="1"/>
-          <p:nvPr/>
-        </p:nvSpPr>
-        <p:spPr>
-          <a:xfrm>
-            <a:off x="621792" y="274320"/>
-            <a:ext cx="11247120" cy="914400"/>
-          </a:xfrm>
-          <a:prstGeom prst="rect">
-            <a:avLst/>
-          </a:prstGeom>
-          <a:noFill/>
-        </p:spPr>
-        <p:txBody>
-          <a:bodyPr wrap="square">
-            <a:spAutoFit/>
-          </a:bodyPr>
-          <a:lstStyle/>
-          <a:p>
-            <a:r>
-              <a:rPr sz="2800" b="1" i="0">
-                <a:solidFill>
-                  <a:srgbClr val="1A1A1A"/>
-                </a:solidFill>
-                <a:latin typeface="Arial"/>
-              </a:rPr>
-              <a:t>The roadmap is the one page both sides point at</a:t>
-            </a:r>
-          </a:p>
-        </p:txBody>
-      </p:sp>
-      <p:sp>
-        <p:nvSpPr>
-          <p:cNvPr id="4" name="Rounded Rectangle 3"/>
-          <p:cNvSpPr/>
-          <p:nvPr/>
-        </p:nvSpPr>
-        <p:spPr>
-          <a:xfrm>
-            <a:off x="658368" y="1554480"/>
-            <a:ext cx="5394960" cy="2377440"/>
-          </a:xfrm>
-          <a:prstGeom prst="roundRect">
-            <a:avLst>
-              <a:gd name="adj" fmla="val 4500"/>
-            </a:avLst>
-          </a:prstGeom>
-          <a:solidFill>
-            <a:srgbClr val="E5F5FB"/>
-          </a:solidFill>
-          <a:ln>
-            <a:noFill/>
-          </a:ln>
-          <a:effectLst/>
-        </p:spPr>
-        <p:style>
-          <a:lnRef idx="1">
-            <a:schemeClr val="accent1"/>
-          </a:lnRef>
-          <a:fillRef idx="3">
-            <a:schemeClr val="accent1"/>
-          </a:fillRef>
-          <a:effectRef idx="2">
-            <a:schemeClr val="accent1"/>
-          </a:effectRef>
-          <a:fontRef idx="minor">
-            <a:schemeClr val="lt1"/>
-          </a:fontRef>
-        </p:style>
-        <p:txBody>
-          <a:bodyPr rtlCol="0" anchor="ctr"/>
-          <a:lstStyle/>
-          <a:p>
-            <a:pPr algn="ctr"/>
-          </a:p>
-        </p:txBody>
-      </p:sp>
-      <p:sp>
-        <p:nvSpPr>
-          <p:cNvPr id="5" name="TextBox 4"/>
-          <p:cNvSpPr txBox="1"/>
-          <p:nvPr/>
-        </p:nvSpPr>
-        <p:spPr>
-          <a:xfrm>
-            <a:off x="859536" y="1700784"/>
-            <a:ext cx="4992624" cy="2103120"/>
-          </a:xfrm>
-          <a:prstGeom prst="rect">
-            <a:avLst/>
-          </a:prstGeom>
-          <a:noFill/>
-        </p:spPr>
-        <p:txBody>
-          <a:bodyPr wrap="square">
-            <a:spAutoFit/>
-          </a:bodyPr>
-          <a:lstStyle/>
-          <a:p>
-            <a:pPr>
-              <a:spcAft>
-                <a:spcPts val="700"/>
-              </a:spcAft>
-            </a:pPr>
-            <a:r>
-              <a:rPr sz="1900" b="1" i="0">
-                <a:solidFill>
-                  <a:srgbClr val="006E96"/>
-                </a:solidFill>
-                <a:latin typeface="Arial"/>
-              </a:rPr>
-              <a:t>THE MINISTER READS</a:t>
-            </a:r>
-          </a:p>
-          <a:p>
-            <a:pPr>
-              <a:spcAft>
-                <a:spcPts val="700"/>
-              </a:spcAft>
-            </a:pPr>
-            <a:r>
-              <a:rPr sz="1600" b="0" i="0">
-                <a:solidFill>
-                  <a:srgbClr val="1A1A1A"/>
-                </a:solidFill>
-                <a:latin typeface="Arial"/>
-              </a:rPr>
-              <a:t>Outcomes and dates.</a:t>
-            </a:r>
-          </a:p>
-          <a:p>
-            <a:pPr>
-              <a:spcAft>
-                <a:spcPts val="700"/>
-              </a:spcAft>
-            </a:pPr>
-            <a:r>
-              <a:rPr sz="1600" b="0" i="0">
-                <a:solidFill>
-                  <a:srgbClr val="1A1A1A"/>
-                </a:solidFill>
-                <a:latin typeface="Arial"/>
-              </a:rPr>
-              <a:t>The single learner record by next year.</a:t>
-            </a:r>
-          </a:p>
-        </p:txBody>
-      </p:sp>
-      <p:sp>
-        <p:nvSpPr>
-          <p:cNvPr id="6" name="Rounded Rectangle 5"/>
-          <p:cNvSpPr/>
-          <p:nvPr/>
-        </p:nvSpPr>
-        <p:spPr>
-          <a:xfrm>
-            <a:off x="6263640" y="1554480"/>
-            <a:ext cx="5394960" cy="2377440"/>
-          </a:xfrm>
-          <a:prstGeom prst="roundRect">
-            <a:avLst>
-              <a:gd name="adj" fmla="val 4500"/>
-            </a:avLst>
-          </a:prstGeom>
-          <a:solidFill>
-            <a:srgbClr val="F2F2F2"/>
-          </a:solidFill>
-          <a:ln>
-            <a:noFill/>
-          </a:ln>
-          <a:effectLst/>
-        </p:spPr>
-        <p:style>
-          <a:lnRef idx="1">
-            <a:schemeClr val="accent1"/>
-          </a:lnRef>
-          <a:fillRef idx="3">
-            <a:schemeClr val="accent1"/>
-          </a:fillRef>
-          <a:effectRef idx="2">
-            <a:schemeClr val="accent1"/>
-          </a:effectRef>
-          <a:fontRef idx="minor">
-            <a:schemeClr val="lt1"/>
-          </a:fontRef>
-        </p:style>
-        <p:txBody>
-          <a:bodyPr rtlCol="0" anchor="ctr"/>
-          <a:lstStyle/>
-          <a:p>
-            <a:pPr algn="ctr"/>
-          </a:p>
-        </p:txBody>
-      </p:sp>
-      <p:sp>
-        <p:nvSpPr>
-          <p:cNvPr id="7" name="TextBox 6"/>
-          <p:cNvSpPr txBox="1"/>
-          <p:nvPr/>
-        </p:nvSpPr>
-        <p:spPr>
-          <a:xfrm>
-            <a:off x="6464808" y="1700784"/>
-            <a:ext cx="4992624" cy="2103120"/>
-          </a:xfrm>
-          <a:prstGeom prst="rect">
-            <a:avLst/>
-          </a:prstGeom>
-          <a:noFill/>
-        </p:spPr>
-        <p:txBody>
-          <a:bodyPr wrap="square">
-            <a:spAutoFit/>
-          </a:bodyPr>
-          <a:lstStyle/>
-          <a:p>
-            <a:pPr>
-              <a:spcAft>
-                <a:spcPts val="700"/>
-              </a:spcAft>
-            </a:pPr>
-            <a:r>
-              <a:rPr sz="1900" b="1" i="0">
-                <a:solidFill>
-                  <a:srgbClr val="006E96"/>
-                </a:solidFill>
-                <a:latin typeface="Arial"/>
-              </a:rPr>
-              <a:t>THE ARCHITECT READS</a:t>
-            </a:r>
-          </a:p>
-          <a:p>
-            <a:pPr>
-              <a:spcAft>
-                <a:spcPts val="700"/>
-              </a:spcAft>
-            </a:pPr>
-            <a:r>
-              <a:rPr sz="1600" b="0" i="0">
-                <a:solidFill>
-                  <a:srgbClr val="1A1A1A"/>
-                </a:solidFill>
-                <a:latin typeface="Arial"/>
-              </a:rPr>
-              <a:t>The sequence and its dependencies.</a:t>
-            </a:r>
-          </a:p>
-          <a:p>
-            <a:pPr>
-              <a:spcAft>
-                <a:spcPts val="700"/>
-              </a:spcAft>
-            </a:pPr>
-            <a:r>
-              <a:rPr sz="1600" b="0" i="0">
-                <a:solidFill>
-                  <a:srgbClr val="1A1A1A"/>
-                </a:solidFill>
-                <a:latin typeface="Arial"/>
-              </a:rPr>
-              <a:t>Wave 2 cannot start until PLR is authoritative in Wave 1.</a:t>
-            </a:r>
-          </a:p>
-        </p:txBody>
-      </p:sp>
-      <p:sp>
-        <p:nvSpPr>
-          <p:cNvPr id="8" name="TextBox 7"/>
-          <p:cNvSpPr txBox="1"/>
-          <p:nvPr/>
-        </p:nvSpPr>
-        <p:spPr>
-          <a:xfrm>
-            <a:off x="658368" y="4114800"/>
-            <a:ext cx="10881360" cy="548640"/>
-          </a:xfrm>
-          <a:prstGeom prst="rect">
-            <a:avLst/>
-          </a:prstGeom>
-          <a:noFill/>
-        </p:spPr>
-        <p:txBody>
-          <a:bodyPr wrap="square">
-            <a:spAutoFit/>
-          </a:bodyPr>
-          <a:lstStyle/>
-          <a:p>
-            <a:r>
-              <a:rPr sz="1550" b="1" i="0">
-                <a:solidFill>
-                  <a:srgbClr val="006E96"/>
-                </a:solidFill>
-                <a:latin typeface="Arial"/>
-              </a:rPr>
-              <a:t>Same page, two readings, no translation lost.</a:t>
-            </a:r>
-          </a:p>
-        </p:txBody>
-      </p:sp>
-      <p:sp>
-        <p:nvSpPr>
-          <p:cNvPr id="9" name="TextBox 8"/>
-          <p:cNvSpPr txBox="1"/>
-          <p:nvPr/>
-        </p:nvSpPr>
-        <p:spPr>
-          <a:xfrm>
-            <a:off x="457200" y="6473952"/>
-            <a:ext cx="7772400" cy="292608"/>
-          </a:xfrm>
-          <a:prstGeom prst="rect">
-            <a:avLst/>
-          </a:prstGeom>
-          <a:noFill/>
-        </p:spPr>
-        <p:txBody>
-          <a:bodyPr wrap="square">
-            <a:spAutoFit/>
-          </a:bodyPr>
-          <a:lstStyle/>
-          <a:p>
-            <a:r>
-              <a:rPr sz="900" b="0" i="0">
-                <a:solidFill>
-                  <a:srgbClr val="595959"/>
-                </a:solidFill>
-                <a:latin typeface="Arial"/>
-              </a:rPr>
-              <a:t>4.6 · Phase 4, Plan — sequence the roadmap and cost it</a:t>
-            </a:r>
-          </a:p>
-        </p:txBody>
-      </p:sp>
-    </p:spTree>
-  </p:cSld>
-  <p:clrMapOvr>
-    <a:masterClrMapping/>
-  </p:clrMapOvr>
-</p:sld>
-</file>
-
-<file path=ppt/slides/slide42.xml><?xml version="1.0" encoding="utf-8"?>
-<p:sld xmlns:a="http://schemas.openxmlformats.org/drawingml/2006/main" xmlns:p="http://schemas.openxmlformats.org/presentationml/2006/main" xmlns:r="http://schemas.openxmlformats.org/officeDocument/2006/relationships">
-  <p:cSld>
-    <p:spTree>
-      <p:nvGrpSpPr>
-        <p:cNvPr id="1" name=""/>
-        <p:cNvGrpSpPr/>
-        <p:nvPr/>
-      </p:nvGrpSpPr>
-      <p:grpSpPr/>
-      <p:sp>
-        <p:nvSpPr>
-          <p:cNvPr id="2" name="Rectangle 1"/>
-          <p:cNvSpPr/>
-          <p:nvPr/>
-        </p:nvSpPr>
-        <p:spPr>
-          <a:xfrm>
-            <a:off x="457200" y="384048"/>
-            <a:ext cx="45720" cy="256032"/>
-          </a:xfrm>
-          <a:prstGeom prst="rect">
-            <a:avLst/>
-          </a:prstGeom>
-          <a:solidFill>
-            <a:srgbClr val="009CD6"/>
-          </a:solidFill>
-          <a:ln>
-            <a:noFill/>
-          </a:ln>
-          <a:effectLst/>
-        </p:spPr>
-        <p:style>
-          <a:lnRef idx="1">
-            <a:schemeClr val="accent1"/>
-          </a:lnRef>
-          <a:fillRef idx="3">
-            <a:schemeClr val="accent1"/>
-          </a:fillRef>
-          <a:effectRef idx="2">
-            <a:schemeClr val="accent1"/>
-          </a:effectRef>
-          <a:fontRef idx="minor">
-            <a:schemeClr val="lt1"/>
-          </a:fontRef>
-        </p:style>
-        <p:txBody>
-          <a:bodyPr rtlCol="0" anchor="ctr"/>
-          <a:lstStyle/>
-          <a:p>
-            <a:pPr algn="ctr"/>
-          </a:p>
-        </p:txBody>
-      </p:sp>
-      <p:sp>
-        <p:nvSpPr>
-          <p:cNvPr id="3" name="TextBox 2"/>
-          <p:cNvSpPr txBox="1"/>
-          <p:nvPr/>
-        </p:nvSpPr>
-        <p:spPr>
-          <a:xfrm>
-            <a:off x="621792" y="274320"/>
-            <a:ext cx="11247120" cy="914400"/>
-          </a:xfrm>
-          <a:prstGeom prst="rect">
-            <a:avLst/>
-          </a:prstGeom>
-          <a:noFill/>
-        </p:spPr>
-        <p:txBody>
-          <a:bodyPr wrap="square">
-            <a:spAutoFit/>
-          </a:bodyPr>
-          <a:lstStyle/>
-          <a:p>
-            <a:r>
-              <a:rPr sz="2800" b="1" i="0">
-                <a:solidFill>
-                  <a:srgbClr val="1A1A1A"/>
-                </a:solidFill>
-                <a:latin typeface="Arial"/>
-              </a:rPr>
-              <a:t>Sign-off four is the most consequential gate of the four</a:t>
-            </a:r>
-          </a:p>
-        </p:txBody>
-      </p:sp>
-      <p:sp>
-        <p:nvSpPr>
-          <p:cNvPr id="4" name="TextBox 3"/>
-          <p:cNvSpPr txBox="1"/>
-          <p:nvPr/>
-        </p:nvSpPr>
-        <p:spPr>
-          <a:xfrm>
-            <a:off x="658368" y="1600200"/>
-            <a:ext cx="10881360" cy="2651760"/>
-          </a:xfrm>
-          <a:prstGeom prst="rect">
-            <a:avLst/>
-          </a:prstGeom>
-          <a:noFill/>
-        </p:spPr>
-        <p:txBody>
-          <a:bodyPr wrap="square">
-            <a:spAutoFit/>
-          </a:bodyPr>
-          <a:lstStyle/>
-          <a:p>
-            <a:pPr>
-              <a:spcAft>
-                <a:spcPts val="1200"/>
-              </a:spcAft>
-            </a:pPr>
-            <a:r>
-              <a:rPr sz="2000" b="0" i="0">
-                <a:solidFill>
-                  <a:srgbClr val="1A1A1A"/>
-                </a:solidFill>
-                <a:latin typeface="Arial"/>
-              </a:rPr>
-              <a:t>The decision-maker and the EA Board approve the roadmap and commit the budget — ideally a multi-year envelope, not an annual line. This is the deliverable the minister takes to cabinet.</a:t>
-            </a:r>
-          </a:p>
-          <a:p>
-            <a:pPr>
-              <a:spcAft>
-                <a:spcPts val="1200"/>
-              </a:spcAft>
-            </a:pPr>
-            <a:r>
-              <a:rPr sz="2000" b="0" i="0">
-                <a:solidFill>
-                  <a:srgbClr val="1A1A1A"/>
-                </a:solidFill>
-                <a:latin typeface="Arial"/>
-              </a:rPr>
-              <a:t>With it approved, Progressa moves from planning to building.</a:t>
-            </a:r>
-          </a:p>
-        </p:txBody>
-      </p:sp>
-      <p:sp>
-        <p:nvSpPr>
-          <p:cNvPr id="5" name="Rounded Rectangle 4"/>
-          <p:cNvSpPr/>
-          <p:nvPr/>
-        </p:nvSpPr>
-        <p:spPr>
-          <a:xfrm>
-            <a:off x="658368" y="4434840"/>
-            <a:ext cx="10881360" cy="1325880"/>
-          </a:xfrm>
-          <a:prstGeom prst="roundRect">
-            <a:avLst>
-              <a:gd name="adj" fmla="val 4500"/>
-            </a:avLst>
-          </a:prstGeom>
-          <a:solidFill>
-            <a:srgbClr val="E5F5FB"/>
-          </a:solidFill>
-          <a:ln>
-            <a:noFill/>
-          </a:ln>
-          <a:effectLst/>
-        </p:spPr>
-        <p:style>
-          <a:lnRef idx="1">
-            <a:schemeClr val="accent1"/>
-          </a:lnRef>
-          <a:fillRef idx="3">
-            <a:schemeClr val="accent1"/>
-          </a:fillRef>
-          <a:effectRef idx="2">
-            <a:schemeClr val="accent1"/>
-          </a:effectRef>
-          <a:fontRef idx="minor">
-            <a:schemeClr val="lt1"/>
-          </a:fontRef>
-        </p:style>
-        <p:txBody>
-          <a:bodyPr rtlCol="0" anchor="ctr"/>
-          <a:lstStyle/>
-          <a:p>
-            <a:pPr algn="ctr"/>
-          </a:p>
-        </p:txBody>
-      </p:sp>
-      <p:sp>
-        <p:nvSpPr>
-          <p:cNvPr id="6" name="TextBox 5"/>
-          <p:cNvSpPr txBox="1"/>
-          <p:nvPr/>
-        </p:nvSpPr>
-        <p:spPr>
-          <a:xfrm>
-            <a:off x="859536" y="4626864"/>
-            <a:ext cx="10479024" cy="1051560"/>
-          </a:xfrm>
-          <a:prstGeom prst="rect">
-            <a:avLst/>
-          </a:prstGeom>
-          <a:noFill/>
-        </p:spPr>
-        <p:txBody>
-          <a:bodyPr wrap="square">
-            <a:spAutoFit/>
-          </a:bodyPr>
-          <a:lstStyle/>
-          <a:p>
-            <a:pPr>
-              <a:spcAft>
-                <a:spcPts val="700"/>
-              </a:spcAft>
-            </a:pPr>
-            <a:r>
-              <a:rPr sz="2300" b="1" i="0">
-                <a:solidFill>
-                  <a:srgbClr val="006E96"/>
-                </a:solidFill>
-                <a:latin typeface="Arial"/>
-              </a:rPr>
-              <a:t>Four sign-offs done, roughly six months from the first day of Discovery.</a:t>
-            </a:r>
-          </a:p>
-        </p:txBody>
-      </p:sp>
-      <p:sp>
-        <p:nvSpPr>
-          <p:cNvPr id="7" name="TextBox 6"/>
-          <p:cNvSpPr txBox="1"/>
-          <p:nvPr/>
-        </p:nvSpPr>
-        <p:spPr>
-          <a:xfrm>
-            <a:off x="457200" y="6473952"/>
-            <a:ext cx="7772400" cy="292608"/>
-          </a:xfrm>
-          <a:prstGeom prst="rect">
-            <a:avLst/>
-          </a:prstGeom>
-          <a:noFill/>
-        </p:spPr>
-        <p:txBody>
-          <a:bodyPr wrap="square">
-            <a:spAutoFit/>
-          </a:bodyPr>
-          <a:lstStyle/>
-          <a:p>
-            <a:r>
-              <a:rPr sz="900" b="0" i="0">
-                <a:solidFill>
-                  <a:srgbClr val="595959"/>
-                </a:solidFill>
-                <a:latin typeface="Arial"/>
-              </a:rPr>
-              <a:t>4.6 · Phase 4, Plan — sequence the roadmap and cost it</a:t>
-            </a:r>
-          </a:p>
-        </p:txBody>
-      </p:sp>
-    </p:spTree>
-  </p:cSld>
-  <p:clrMapOvr>
-    <a:masterClrMapping/>
-  </p:clrMapOvr>
-</p:sld>
-</file>
-
-<file path=ppt/slides/slide43.xml><?xml version="1.0" encoding="utf-8"?>
-<p:sld xmlns:a="http://schemas.openxmlformats.org/drawingml/2006/main" xmlns:p="http://schemas.openxmlformats.org/presentationml/2006/main" xmlns:r="http://schemas.openxmlformats.org/officeDocument/2006/relationships">
-  <p:cSld>
-    <p:spTree>
-      <p:nvGrpSpPr>
-        <p:cNvPr id="1" name=""/>
-        <p:cNvGrpSpPr/>
-        <p:nvPr/>
-      </p:nvGrpSpPr>
-      <p:grpSpPr/>
-      <p:sp>
-        <p:nvSpPr>
-          <p:cNvPr id="2" name="TextBox 1"/>
-          <p:cNvSpPr txBox="1"/>
-          <p:nvPr/>
-        </p:nvSpPr>
-        <p:spPr>
-          <a:xfrm>
-            <a:off x="1005840" y="2103120"/>
-            <a:ext cx="10149840" cy="2377440"/>
-          </a:xfrm>
-          <a:prstGeom prst="rect">
-            <a:avLst/>
-          </a:prstGeom>
-          <a:noFill/>
-        </p:spPr>
-        <p:txBody>
-          <a:bodyPr wrap="square">
-            <a:spAutoFit/>
-          </a:bodyPr>
-          <a:lstStyle/>
-          <a:p>
-            <a:r>
-              <a:rPr sz="3000" b="1" i="0">
-                <a:solidFill>
-                  <a:srgbClr val="1A1A1A"/>
-                </a:solidFill>
-                <a:latin typeface="Arial"/>
-              </a:rPr>
-              <a:t>Plan turns Progressa’s decisions into a wave-sequenced, costed roadmap — the cabinet-ready document business and IT both read — with the minister’s flagship landing inside the first year.</a:t>
-            </a:r>
-          </a:p>
-        </p:txBody>
-      </p:sp>
-      <p:sp>
-        <p:nvSpPr>
-          <p:cNvPr id="3" name="TextBox 2"/>
-          <p:cNvSpPr txBox="1"/>
-          <p:nvPr/>
-        </p:nvSpPr>
-        <p:spPr>
-          <a:xfrm>
-            <a:off x="1005840" y="1554480"/>
-            <a:ext cx="5486400" cy="365760"/>
-          </a:xfrm>
-          <a:prstGeom prst="rect">
-            <a:avLst/>
-          </a:prstGeom>
-          <a:noFill/>
-        </p:spPr>
-        <p:txBody>
-          <a:bodyPr wrap="square">
-            <a:spAutoFit/>
-          </a:bodyPr>
-          <a:lstStyle/>
-          <a:p>
-            <a:r>
-              <a:rPr sz="1200" b="1" i="0">
-                <a:solidFill>
-                  <a:srgbClr val="006E96"/>
-                </a:solidFill>
-                <a:latin typeface="Arial"/>
-              </a:rPr>
-              <a:t>IN ONE SENTENCE</a:t>
-            </a:r>
-          </a:p>
-        </p:txBody>
-      </p:sp>
-      <p:sp>
-        <p:nvSpPr>
-          <p:cNvPr id="4" name="Rounded Rectangle 3"/>
-          <p:cNvSpPr/>
-          <p:nvPr/>
-        </p:nvSpPr>
-        <p:spPr>
-          <a:xfrm>
-            <a:off x="658368" y="4709160"/>
-            <a:ext cx="10881360" cy="1554480"/>
-          </a:xfrm>
-          <a:prstGeom prst="roundRect">
-            <a:avLst>
-              <a:gd name="adj" fmla="val 4500"/>
-            </a:avLst>
-          </a:prstGeom>
-          <a:solidFill>
-            <a:srgbClr val="FFFFFF"/>
-          </a:solidFill>
-          <a:ln w="9525">
-            <a:solidFill>
-              <a:srgbClr val="009CD6"/>
-            </a:solidFill>
-          </a:ln>
-          <a:effectLst/>
-        </p:spPr>
-        <p:style>
-          <a:lnRef idx="1">
-            <a:schemeClr val="accent1"/>
-          </a:lnRef>
-          <a:fillRef idx="3">
-            <a:schemeClr val="accent1"/>
-          </a:fillRef>
-          <a:effectRef idx="2">
-            <a:schemeClr val="accent1"/>
-          </a:effectRef>
-          <a:fontRef idx="minor">
-            <a:schemeClr val="lt1"/>
-          </a:fontRef>
-        </p:style>
-        <p:txBody>
-          <a:bodyPr rtlCol="0" anchor="ctr" wrap="square" lIns="228600" rIns="228600" tIns="109728" bIns="109728">
-            <a:noAutofit/>
-          </a:bodyPr>
-          <a:lstStyle/>
-          <a:p>
-            <a:pPr algn="l">
-              <a:spcAft>
-                <a:spcPts val="400"/>
-              </a:spcAft>
-            </a:pPr>
-            <a:r>
-              <a:rPr sz="1800" b="1" i="0">
-                <a:solidFill>
-                  <a:srgbClr val="006E96"/>
-                </a:solidFill>
-                <a:latin typeface="Arial"/>
-              </a:rPr>
-              <a:t>Do this on your own sector. </a:t>
-            </a:r>
-            <a:r>
-              <a:rPr sz="1800" b="1" i="0">
-                <a:solidFill>
-                  <a:srgbClr val="1A1A1A"/>
-                </a:solidFill>
-                <a:latin typeface="Arial"/>
-              </a:rPr>
-              <a:t>Sequence your roadmap into waves.</a:t>
-            </a:r>
-          </a:p>
-          <a:p>
-            <a:pPr algn="l">
-              <a:spcAft>
-                <a:spcPts val="400"/>
-              </a:spcAft>
-            </a:pPr>
-            <a:r>
-              <a:rPr sz="1800" b="0" i="0">
-                <a:solidFill>
-                  <a:srgbClr val="595959"/>
-                </a:solidFill>
-                <a:latin typeface="Arial"/>
-              </a:rPr>
-              <a:t>The prompt in the companion material gives you a four-wave roadmap with deliverables, dependencies and cost drivers. Before the next video.</a:t>
-            </a:r>
-          </a:p>
-        </p:txBody>
-      </p:sp>
-      <p:sp>
-        <p:nvSpPr>
-          <p:cNvPr id="5" name="TextBox 4"/>
-          <p:cNvSpPr txBox="1"/>
-          <p:nvPr/>
-        </p:nvSpPr>
-        <p:spPr>
-          <a:xfrm>
-            <a:off x="457200" y="6473952"/>
-            <a:ext cx="7772400" cy="292608"/>
-          </a:xfrm>
-          <a:prstGeom prst="rect">
-            <a:avLst/>
-          </a:prstGeom>
-          <a:noFill/>
-        </p:spPr>
-        <p:txBody>
-          <a:bodyPr wrap="square">
-            <a:spAutoFit/>
-          </a:bodyPr>
-          <a:lstStyle/>
-          <a:p>
-            <a:r>
-              <a:rPr sz="900" b="0" i="0">
-                <a:solidFill>
-                  <a:srgbClr val="595959"/>
-                </a:solidFill>
-                <a:latin typeface="Arial"/>
-              </a:rPr>
-              <a:t>4.6 · Phase 4, Plan — sequence the roadmap and cost it</a:t>
-            </a:r>
-          </a:p>
-        </p:txBody>
-      </p:sp>
-      <p:sp>
-        <p:nvSpPr>
-          <p:cNvPr id="6" name="TextBox 5"/>
-          <p:cNvSpPr txBox="1"/>
-          <p:nvPr/>
-        </p:nvSpPr>
-        <p:spPr>
-          <a:xfrm>
-            <a:off x="10058400" y="6473952"/>
-            <a:ext cx="1673352" cy="292608"/>
-          </a:xfrm>
-          <a:prstGeom prst="rect">
-            <a:avLst/>
-          </a:prstGeom>
-          <a:noFill/>
-        </p:spPr>
-        <p:txBody>
-          <a:bodyPr wrap="square">
-            <a:spAutoFit/>
-          </a:bodyPr>
-          <a:lstStyle/>
-          <a:p>
-            <a:pPr algn="r"/>
-            <a:r>
-              <a:rPr sz="900" b="0" i="0">
-                <a:solidFill>
-                  <a:srgbClr val="595959"/>
-                </a:solidFill>
-                <a:latin typeface="Arial"/>
-              </a:rPr>
-              <a:t>www.itu.int</a:t>
-            </a:r>
-          </a:p>
-        </p:txBody>
-      </p:sp>
-    </p:spTree>
-  </p:cSld>
-  <p:clrMapOvr>
-    <a:masterClrMapping/>
-  </p:clrMapOvr>
-</p:sld>
-</file>
-
-<file path=ppt/slides/slide44.xml><?xml version="1.0" encoding="utf-8"?>
+<file path=ppt/slides/slide50.xml><?xml version="1.0" encoding="utf-8"?>
 <p:sld xmlns:a="http://schemas.openxmlformats.org/drawingml/2006/main" xmlns:p="http://schemas.openxmlformats.org/presentationml/2006/main" xmlns:r="http://schemas.openxmlformats.org/officeDocument/2006/relationships">
   <p:cSld>
     <p:spTree>

--- a/10-Knowledge-Products/KP1-GEA/videos/module_4/en/decks/KP1_M4_4.6_Deck_v0.2.pptx
+++ b/10-Knowledge-Products/KP1-GEA/videos/module_4/en/decks/KP1_M4_4.6_Deck_v0.2.pptx
@@ -11771,7 +11771,7 @@
                 </a:solidFill>
                 <a:latin typeface="Arial"/>
               </a:rPr>
-              <a:t>~4 minutes · standalone video · voice-over on text slides</a:t>
+              <a:t>standalone video · voice-over on text slides</a:t>
             </a:r>
           </a:p>
         </p:txBody>

--- a/10-Knowledge-Products/KP1-GEA/videos/module_4/en/decks/KP1_M4_4.6_Deck_v0.2.pptx
+++ b/10-Knowledge-Products/KP1-GEA/videos/module_4/en/decks/KP1_M4_4.6_Deck_v0.2.pptx
@@ -11635,7 +11635,7 @@
                 </a:solidFill>
                 <a:latin typeface="Arial"/>
               </a:rPr>
-              <a:t>KP1 · MODULE 4 · VIDEO 4.6</a:t>
+              <a:t>MODULE 4 · VIDEO 4.6</a:t>
             </a:r>
           </a:p>
         </p:txBody>
